--- a/docs/pptx/carbo/ritu-carbo-linsubhr-sens-throm2.pptx
+++ b/docs/pptx/carbo/ritu-carbo-linsubhr-sens-throm2.pptx
@@ -2443,7 +2443,7 @@
           </p:nvSpPr>
           <p:spPr>
             <a:xfrm>
-              <a:off x="868706" y="2073503"/>
+              <a:off x="869934" y="2073503"/>
               <a:ext cx="0" cy="3649639"/>
             </a:xfrm>
             <a:custGeom>
@@ -2486,7 +2486,7 @@
           </p:nvSpPr>
           <p:spPr>
             <a:xfrm>
-              <a:off x="2695888" y="2073503"/>
+              <a:off x="2693907" y="2073503"/>
               <a:ext cx="0" cy="3649639"/>
             </a:xfrm>
             <a:custGeom>
@@ -2529,7 +2529,7 @@
           </p:nvSpPr>
           <p:spPr>
             <a:xfrm>
-              <a:off x="4523069" y="2073503"/>
+              <a:off x="4517879" y="2073503"/>
               <a:ext cx="0" cy="3649639"/>
             </a:xfrm>
             <a:custGeom>
@@ -2572,7 +2572,7 @@
           </p:nvSpPr>
           <p:spPr>
             <a:xfrm>
-              <a:off x="6350251" y="2073503"/>
+              <a:off x="6341852" y="2073503"/>
               <a:ext cx="0" cy="3649639"/>
             </a:xfrm>
             <a:custGeom>
@@ -2615,7 +2615,7 @@
           </p:nvSpPr>
           <p:spPr>
             <a:xfrm>
-              <a:off x="8177433" y="2073503"/>
+              <a:off x="8165824" y="2073503"/>
               <a:ext cx="0" cy="3649639"/>
             </a:xfrm>
             <a:custGeom>
@@ -2873,7 +2873,7 @@
           </p:nvSpPr>
           <p:spPr>
             <a:xfrm>
-              <a:off x="1782297" y="2073503"/>
+              <a:off x="1781921" y="2073503"/>
               <a:ext cx="0" cy="3649639"/>
             </a:xfrm>
             <a:custGeom>
@@ -2916,7 +2916,7 @@
           </p:nvSpPr>
           <p:spPr>
             <a:xfrm>
-              <a:off x="3609478" y="2073503"/>
+              <a:off x="3605893" y="2073503"/>
               <a:ext cx="0" cy="3649639"/>
             </a:xfrm>
             <a:custGeom>
@@ -2959,7 +2959,7 @@
           </p:nvSpPr>
           <p:spPr>
             <a:xfrm>
-              <a:off x="5436660" y="2073503"/>
+              <a:off x="5429866" y="2073503"/>
               <a:ext cx="0" cy="3649639"/>
             </a:xfrm>
             <a:custGeom>
@@ -3002,7 +3002,7 @@
           </p:nvSpPr>
           <p:spPr>
             <a:xfrm>
-              <a:off x="7263842" y="2073503"/>
+              <a:off x="7253838" y="2073503"/>
               <a:ext cx="0" cy="3649639"/>
             </a:xfrm>
             <a:custGeom>
@@ -3046,572 +3046,572 @@
           <p:spPr>
             <a:xfrm>
               <a:off x="1172049" y="2073503"/>
-              <a:ext cx="7090630" cy="3361748"/>
+              <a:ext cx="7090630" cy="3363215"/>
             </a:xfrm>
             <a:custGeom>
               <a:avLst/>
               <a:pathLst>
-                <a:path w="7090630" h="3361748">
+                <a:path w="7090630" h="3363215">
                   <a:moveTo>
-                    <a:pt x="0" y="315912"/>
+                    <a:pt x="0" y="289003"/>
                   </a:moveTo>
                   <a:lnTo>
-                    <a:pt x="71622" y="402558"/>
-                  </a:lnTo>
-                  <a:lnTo>
-                    <a:pt x="143245" y="486834"/>
-                  </a:lnTo>
-                  <a:lnTo>
-                    <a:pt x="214867" y="568804"/>
-                  </a:lnTo>
-                  <a:lnTo>
-                    <a:pt x="286490" y="648533"/>
-                  </a:lnTo>
-                  <a:lnTo>
-                    <a:pt x="358112" y="726081"/>
-                  </a:lnTo>
-                  <a:lnTo>
-                    <a:pt x="429735" y="801508"/>
-                  </a:lnTo>
-                  <a:lnTo>
-                    <a:pt x="501357" y="874872"/>
-                  </a:lnTo>
-                  <a:lnTo>
-                    <a:pt x="572980" y="946229"/>
-                  </a:lnTo>
-                  <a:lnTo>
-                    <a:pt x="644602" y="1015635"/>
-                  </a:lnTo>
-                  <a:lnTo>
-                    <a:pt x="716225" y="1083142"/>
-                  </a:lnTo>
-                  <a:lnTo>
-                    <a:pt x="787847" y="1148803"/>
-                  </a:lnTo>
-                  <a:lnTo>
-                    <a:pt x="859470" y="1212668"/>
-                  </a:lnTo>
-                  <a:lnTo>
-                    <a:pt x="931092" y="1274786"/>
-                  </a:lnTo>
-                  <a:lnTo>
-                    <a:pt x="1002715" y="1335205"/>
-                  </a:lnTo>
-                  <a:lnTo>
-                    <a:pt x="1074337" y="1393971"/>
-                  </a:lnTo>
-                  <a:lnTo>
-                    <a:pt x="1145960" y="1451130"/>
-                  </a:lnTo>
-                  <a:lnTo>
-                    <a:pt x="1217582" y="1506726"/>
-                  </a:lnTo>
-                  <a:lnTo>
-                    <a:pt x="1289205" y="1560801"/>
-                  </a:lnTo>
-                  <a:lnTo>
-                    <a:pt x="1360827" y="1613397"/>
-                  </a:lnTo>
-                  <a:lnTo>
-                    <a:pt x="1432450" y="1664554"/>
-                  </a:lnTo>
-                  <a:lnTo>
-                    <a:pt x="1504073" y="1714312"/>
-                  </a:lnTo>
-                  <a:lnTo>
-                    <a:pt x="1575695" y="1762709"/>
-                  </a:lnTo>
-                  <a:lnTo>
-                    <a:pt x="1647318" y="1809783"/>
-                  </a:lnTo>
-                  <a:lnTo>
-                    <a:pt x="1718940" y="1855568"/>
-                  </a:lnTo>
-                  <a:lnTo>
-                    <a:pt x="1790563" y="1900102"/>
-                  </a:lnTo>
-                  <a:lnTo>
-                    <a:pt x="1862185" y="1943417"/>
-                  </a:lnTo>
-                  <a:lnTo>
-                    <a:pt x="1933808" y="1985548"/>
-                  </a:lnTo>
-                  <a:lnTo>
-                    <a:pt x="2005430" y="2026526"/>
-                  </a:lnTo>
-                  <a:lnTo>
-                    <a:pt x="2077053" y="2066384"/>
-                  </a:lnTo>
-                  <a:lnTo>
-                    <a:pt x="2148675" y="2105151"/>
-                  </a:lnTo>
-                  <a:lnTo>
-                    <a:pt x="2220298" y="2142858"/>
-                  </a:lnTo>
-                  <a:lnTo>
-                    <a:pt x="2291920" y="2179534"/>
-                  </a:lnTo>
-                  <a:lnTo>
-                    <a:pt x="2363543" y="2215206"/>
-                  </a:lnTo>
-                  <a:lnTo>
-                    <a:pt x="2435165" y="2249903"/>
-                  </a:lnTo>
-                  <a:lnTo>
-                    <a:pt x="2506788" y="2283651"/>
-                  </a:lnTo>
-                  <a:lnTo>
-                    <a:pt x="2578410" y="2316476"/>
-                  </a:lnTo>
-                  <a:lnTo>
-                    <a:pt x="2650033" y="2348403"/>
-                  </a:lnTo>
-                  <a:lnTo>
-                    <a:pt x="2721655" y="2379456"/>
-                  </a:lnTo>
-                  <a:lnTo>
-                    <a:pt x="2793278" y="2409661"/>
-                  </a:lnTo>
-                  <a:lnTo>
-                    <a:pt x="2864901" y="2439039"/>
-                  </a:lnTo>
-                  <a:lnTo>
-                    <a:pt x="2936523" y="2467613"/>
-                  </a:lnTo>
-                  <a:lnTo>
-                    <a:pt x="3008146" y="2495406"/>
-                  </a:lnTo>
-                  <a:lnTo>
-                    <a:pt x="3079768" y="2522439"/>
-                  </a:lnTo>
-                  <a:lnTo>
-                    <a:pt x="3151391" y="2548733"/>
-                  </a:lnTo>
-                  <a:lnTo>
-                    <a:pt x="3223013" y="2574307"/>
-                  </a:lnTo>
-                  <a:lnTo>
-                    <a:pt x="3294636" y="2599182"/>
-                  </a:lnTo>
-                  <a:lnTo>
-                    <a:pt x="3366258" y="2623376"/>
-                  </a:lnTo>
-                  <a:lnTo>
-                    <a:pt x="3437881" y="2646909"/>
-                  </a:lnTo>
-                  <a:lnTo>
-                    <a:pt x="3509503" y="2631575"/>
-                  </a:lnTo>
-                  <a:lnTo>
-                    <a:pt x="3581126" y="2597091"/>
-                  </a:lnTo>
-                  <a:lnTo>
-                    <a:pt x="3652748" y="2561211"/>
-                  </a:lnTo>
-                  <a:lnTo>
-                    <a:pt x="3724371" y="2523880"/>
-                  </a:lnTo>
-                  <a:lnTo>
-                    <a:pt x="3795993" y="2485037"/>
-                  </a:lnTo>
-                  <a:lnTo>
-                    <a:pt x="3867616" y="2444623"/>
-                  </a:lnTo>
-                  <a:lnTo>
-                    <a:pt x="3939238" y="2402574"/>
-                  </a:lnTo>
-                  <a:lnTo>
-                    <a:pt x="4010861" y="2358823"/>
-                  </a:lnTo>
-                  <a:lnTo>
-                    <a:pt x="4082483" y="2313302"/>
-                  </a:lnTo>
-                  <a:lnTo>
-                    <a:pt x="4154106" y="2265938"/>
-                  </a:lnTo>
-                  <a:lnTo>
-                    <a:pt x="4225729" y="2216658"/>
-                  </a:lnTo>
-                  <a:lnTo>
-                    <a:pt x="4297351" y="2165383"/>
-                  </a:lnTo>
-                  <a:lnTo>
-                    <a:pt x="4368974" y="2112034"/>
-                  </a:lnTo>
-                  <a:lnTo>
-                    <a:pt x="4440596" y="2056526"/>
-                  </a:lnTo>
-                  <a:lnTo>
-                    <a:pt x="4512219" y="1998772"/>
-                  </a:lnTo>
-                  <a:lnTo>
-                    <a:pt x="4583841" y="1938680"/>
-                  </a:lnTo>
-                  <a:lnTo>
-                    <a:pt x="4655464" y="1876157"/>
-                  </a:lnTo>
-                  <a:lnTo>
-                    <a:pt x="4727086" y="1811104"/>
-                  </a:lnTo>
-                  <a:lnTo>
-                    <a:pt x="4798709" y="1743419"/>
-                  </a:lnTo>
-                  <a:lnTo>
-                    <a:pt x="4870331" y="1672994"/>
-                  </a:lnTo>
-                  <a:lnTo>
-                    <a:pt x="4941954" y="1599720"/>
-                  </a:lnTo>
-                  <a:lnTo>
-                    <a:pt x="5013576" y="1523480"/>
-                  </a:lnTo>
-                  <a:lnTo>
-                    <a:pt x="5085199" y="1444155"/>
-                  </a:lnTo>
-                  <a:lnTo>
-                    <a:pt x="5156821" y="1361621"/>
-                  </a:lnTo>
-                  <a:lnTo>
-                    <a:pt x="5228444" y="1275746"/>
-                  </a:lnTo>
-                  <a:lnTo>
-                    <a:pt x="5300066" y="1186397"/>
-                  </a:lnTo>
-                  <a:lnTo>
-                    <a:pt x="5371689" y="1093432"/>
-                  </a:lnTo>
-                  <a:lnTo>
-                    <a:pt x="5443311" y="996704"/>
-                  </a:lnTo>
-                  <a:lnTo>
-                    <a:pt x="5514934" y="896063"/>
-                  </a:lnTo>
-                  <a:lnTo>
-                    <a:pt x="5586557" y="791349"/>
-                  </a:lnTo>
-                  <a:lnTo>
-                    <a:pt x="5658179" y="682398"/>
-                  </a:lnTo>
-                  <a:lnTo>
-                    <a:pt x="5729802" y="569038"/>
-                  </a:lnTo>
-                  <a:lnTo>
-                    <a:pt x="5801424" y="451090"/>
-                  </a:lnTo>
-                  <a:lnTo>
-                    <a:pt x="5873047" y="328370"/>
-                  </a:lnTo>
-                  <a:lnTo>
-                    <a:pt x="5944669" y="200684"/>
-                  </a:lnTo>
-                  <a:lnTo>
-                    <a:pt x="6016292" y="67830"/>
-                  </a:lnTo>
-                  <a:lnTo>
-                    <a:pt x="6051438" y="0"/>
+                    <a:pt x="71622" y="376536"/>
+                  </a:lnTo>
+                  <a:lnTo>
+                    <a:pt x="143245" y="461671"/>
+                  </a:lnTo>
+                  <a:lnTo>
+                    <a:pt x="214867" y="544474"/>
+                  </a:lnTo>
+                  <a:lnTo>
+                    <a:pt x="286490" y="625008"/>
+                  </a:lnTo>
+                  <a:lnTo>
+                    <a:pt x="358112" y="703335"/>
+                  </a:lnTo>
+                  <a:lnTo>
+                    <a:pt x="429735" y="779516"/>
+                  </a:lnTo>
+                  <a:lnTo>
+                    <a:pt x="501357" y="853609"/>
+                  </a:lnTo>
+                  <a:lnTo>
+                    <a:pt x="572980" y="925673"/>
+                  </a:lnTo>
+                  <a:lnTo>
+                    <a:pt x="644602" y="995762"/>
+                  </a:lnTo>
+                  <a:lnTo>
+                    <a:pt x="716225" y="1063931"/>
+                  </a:lnTo>
+                  <a:lnTo>
+                    <a:pt x="787847" y="1130232"/>
+                  </a:lnTo>
+                  <a:lnTo>
+                    <a:pt x="859470" y="1194716"/>
+                  </a:lnTo>
+                  <a:lnTo>
+                    <a:pt x="931092" y="1257434"/>
+                  </a:lnTo>
+                  <a:lnTo>
+                    <a:pt x="1002715" y="1318433"/>
+                  </a:lnTo>
+                  <a:lnTo>
+                    <a:pt x="1074337" y="1377761"/>
+                  </a:lnTo>
+                  <a:lnTo>
+                    <a:pt x="1145960" y="1435463"/>
+                  </a:lnTo>
+                  <a:lnTo>
+                    <a:pt x="1217582" y="1491584"/>
+                  </a:lnTo>
+                  <a:lnTo>
+                    <a:pt x="1289205" y="1546168"/>
+                  </a:lnTo>
+                  <a:lnTo>
+                    <a:pt x="1360827" y="1599256"/>
+                  </a:lnTo>
+                  <a:lnTo>
+                    <a:pt x="1432450" y="1650890"/>
+                  </a:lnTo>
+                  <a:lnTo>
+                    <a:pt x="1504073" y="1701108"/>
+                  </a:lnTo>
+                  <a:lnTo>
+                    <a:pt x="1575695" y="1749951"/>
+                  </a:lnTo>
+                  <a:lnTo>
+                    <a:pt x="1647318" y="1797456"/>
+                  </a:lnTo>
+                  <a:lnTo>
+                    <a:pt x="1718940" y="1843659"/>
+                  </a:lnTo>
+                  <a:lnTo>
+                    <a:pt x="1790563" y="1888596"/>
+                  </a:lnTo>
+                  <a:lnTo>
+                    <a:pt x="1862185" y="1932302"/>
+                  </a:lnTo>
+                  <a:lnTo>
+                    <a:pt x="1933808" y="1974810"/>
+                  </a:lnTo>
+                  <a:lnTo>
+                    <a:pt x="2005430" y="2016154"/>
+                  </a:lnTo>
+                  <a:lnTo>
+                    <a:pt x="2077053" y="2056364"/>
+                  </a:lnTo>
+                  <a:lnTo>
+                    <a:pt x="2148675" y="2095474"/>
+                  </a:lnTo>
+                  <a:lnTo>
+                    <a:pt x="2220298" y="2133511"/>
+                  </a:lnTo>
+                  <a:lnTo>
+                    <a:pt x="2291920" y="2170506"/>
+                  </a:lnTo>
+                  <a:lnTo>
+                    <a:pt x="2363543" y="2206488"/>
+                  </a:lnTo>
+                  <a:lnTo>
+                    <a:pt x="2435165" y="2241484"/>
+                  </a:lnTo>
+                  <a:lnTo>
+                    <a:pt x="2506788" y="2275521"/>
+                  </a:lnTo>
+                  <a:lnTo>
+                    <a:pt x="2578410" y="2308625"/>
+                  </a:lnTo>
+                  <a:lnTo>
+                    <a:pt x="2650033" y="2340823"/>
+                  </a:lnTo>
+                  <a:lnTo>
+                    <a:pt x="2721655" y="2372138"/>
+                  </a:lnTo>
+                  <a:lnTo>
+                    <a:pt x="2793278" y="2402595"/>
+                  </a:lnTo>
+                  <a:lnTo>
+                    <a:pt x="2864901" y="2432218"/>
+                  </a:lnTo>
+                  <a:lnTo>
+                    <a:pt x="2936523" y="2461029"/>
+                  </a:lnTo>
+                  <a:lnTo>
+                    <a:pt x="3008146" y="2489050"/>
+                  </a:lnTo>
+                  <a:lnTo>
+                    <a:pt x="3079768" y="2516304"/>
+                  </a:lnTo>
+                  <a:lnTo>
+                    <a:pt x="3151391" y="2542811"/>
+                  </a:lnTo>
+                  <a:lnTo>
+                    <a:pt x="3223013" y="2568592"/>
+                  </a:lnTo>
+                  <a:lnTo>
+                    <a:pt x="3294636" y="2593667"/>
+                  </a:lnTo>
+                  <a:lnTo>
+                    <a:pt x="3366258" y="2618054"/>
+                  </a:lnTo>
+                  <a:lnTo>
+                    <a:pt x="3437881" y="2641773"/>
+                  </a:lnTo>
+                  <a:lnTo>
+                    <a:pt x="3509503" y="2638941"/>
+                  </a:lnTo>
+                  <a:lnTo>
+                    <a:pt x="3581126" y="2604693"/>
+                  </a:lnTo>
+                  <a:lnTo>
+                    <a:pt x="3652748" y="2569057"/>
+                  </a:lnTo>
+                  <a:lnTo>
+                    <a:pt x="3724371" y="2531977"/>
+                  </a:lnTo>
+                  <a:lnTo>
+                    <a:pt x="3795993" y="2493393"/>
+                  </a:lnTo>
+                  <a:lnTo>
+                    <a:pt x="3867616" y="2453245"/>
+                  </a:lnTo>
+                  <a:lnTo>
+                    <a:pt x="3939238" y="2411470"/>
+                  </a:lnTo>
+                  <a:lnTo>
+                    <a:pt x="4010861" y="2368001"/>
+                  </a:lnTo>
+                  <a:lnTo>
+                    <a:pt x="4082483" y="2322770"/>
+                  </a:lnTo>
+                  <a:lnTo>
+                    <a:pt x="4154106" y="2275706"/>
+                  </a:lnTo>
+                  <a:lnTo>
+                    <a:pt x="4225729" y="2226733"/>
+                  </a:lnTo>
+                  <a:lnTo>
+                    <a:pt x="4297351" y="2175775"/>
+                  </a:lnTo>
+                  <a:lnTo>
+                    <a:pt x="4368974" y="2122751"/>
+                  </a:lnTo>
+                  <a:lnTo>
+                    <a:pt x="4440596" y="2067578"/>
+                  </a:lnTo>
+                  <a:lnTo>
+                    <a:pt x="4512219" y="2010168"/>
+                  </a:lnTo>
+                  <a:lnTo>
+                    <a:pt x="4583841" y="1950431"/>
+                  </a:lnTo>
+                  <a:lnTo>
+                    <a:pt x="4655464" y="1888272"/>
+                  </a:lnTo>
+                  <a:lnTo>
+                    <a:pt x="4727086" y="1823593"/>
+                  </a:lnTo>
+                  <a:lnTo>
+                    <a:pt x="4798709" y="1756293"/>
+                  </a:lnTo>
+                  <a:lnTo>
+                    <a:pt x="4870331" y="1686264"/>
+                  </a:lnTo>
+                  <a:lnTo>
+                    <a:pt x="4941954" y="1613396"/>
+                  </a:lnTo>
+                  <a:lnTo>
+                    <a:pt x="5013576" y="1537574"/>
+                  </a:lnTo>
+                  <a:lnTo>
+                    <a:pt x="5085199" y="1458678"/>
+                  </a:lnTo>
+                  <a:lnTo>
+                    <a:pt x="5156821" y="1376584"/>
+                  </a:lnTo>
+                  <a:lnTo>
+                    <a:pt x="5228444" y="1291162"/>
+                  </a:lnTo>
+                  <a:lnTo>
+                    <a:pt x="5300066" y="1202277"/>
+                  </a:lnTo>
+                  <a:lnTo>
+                    <a:pt x="5371689" y="1109789"/>
+                  </a:lnTo>
+                  <a:lnTo>
+                    <a:pt x="5443311" y="1013552"/>
+                  </a:lnTo>
+                  <a:lnTo>
+                    <a:pt x="5514934" y="913413"/>
+                  </a:lnTo>
+                  <a:lnTo>
+                    <a:pt x="5586557" y="809214"/>
+                  </a:lnTo>
+                  <a:lnTo>
+                    <a:pt x="5658179" y="700792"/>
+                  </a:lnTo>
+                  <a:lnTo>
+                    <a:pt x="5729802" y="587974"/>
+                  </a:lnTo>
+                  <a:lnTo>
+                    <a:pt x="5801424" y="470583"/>
+                  </a:lnTo>
+                  <a:lnTo>
+                    <a:pt x="5873047" y="348432"/>
+                  </a:lnTo>
+                  <a:lnTo>
+                    <a:pt x="5944669" y="221330"/>
+                  </a:lnTo>
+                  <a:lnTo>
+                    <a:pt x="6016292" y="89076"/>
+                  </a:lnTo>
+                  <a:lnTo>
+                    <a:pt x="6062651" y="0"/>
                   </a:lnTo>
                   <a:lnTo>
                     <a:pt x="7090630" y="0"/>
                   </a:lnTo>
                   <a:lnTo>
-                    <a:pt x="7090630" y="3280329"/>
-                  </a:lnTo>
-                  <a:lnTo>
-                    <a:pt x="7019007" y="3274609"/>
-                  </a:lnTo>
-                  <a:lnTo>
-                    <a:pt x="6947385" y="3268728"/>
-                  </a:lnTo>
-                  <a:lnTo>
-                    <a:pt x="6875762" y="3262681"/>
-                  </a:lnTo>
-                  <a:lnTo>
-                    <a:pt x="6804139" y="3256465"/>
-                  </a:lnTo>
-                  <a:lnTo>
-                    <a:pt x="6732517" y="3250073"/>
-                  </a:lnTo>
-                  <a:lnTo>
-                    <a:pt x="6660894" y="3243502"/>
-                  </a:lnTo>
-                  <a:lnTo>
-                    <a:pt x="6589272" y="3236746"/>
-                  </a:lnTo>
-                  <a:lnTo>
-                    <a:pt x="6517649" y="3229801"/>
-                  </a:lnTo>
-                  <a:lnTo>
-                    <a:pt x="6446027" y="3222659"/>
-                  </a:lnTo>
-                  <a:lnTo>
-                    <a:pt x="6374404" y="3215317"/>
-                  </a:lnTo>
-                  <a:lnTo>
-                    <a:pt x="6302782" y="3207769"/>
-                  </a:lnTo>
-                  <a:lnTo>
-                    <a:pt x="6231159" y="3200008"/>
-                  </a:lnTo>
-                  <a:lnTo>
-                    <a:pt x="6159537" y="3192029"/>
-                  </a:lnTo>
-                  <a:lnTo>
-                    <a:pt x="6087914" y="3183826"/>
-                  </a:lnTo>
-                  <a:lnTo>
-                    <a:pt x="6016292" y="3175392"/>
-                  </a:lnTo>
-                  <a:lnTo>
-                    <a:pt x="5944669" y="3166721"/>
-                  </a:lnTo>
-                  <a:lnTo>
-                    <a:pt x="5873047" y="3157806"/>
-                  </a:lnTo>
-                  <a:lnTo>
-                    <a:pt x="5801424" y="3148640"/>
-                  </a:lnTo>
-                  <a:lnTo>
-                    <a:pt x="5729802" y="3139216"/>
-                  </a:lnTo>
-                  <a:lnTo>
-                    <a:pt x="5658179" y="3129528"/>
-                  </a:lnTo>
-                  <a:lnTo>
-                    <a:pt x="5586557" y="3119567"/>
-                  </a:lnTo>
-                  <a:lnTo>
-                    <a:pt x="5514934" y="3109326"/>
-                  </a:lnTo>
-                  <a:lnTo>
-                    <a:pt x="5443311" y="3098797"/>
-                  </a:lnTo>
-                  <a:lnTo>
-                    <a:pt x="5371689" y="3087972"/>
-                  </a:lnTo>
-                  <a:lnTo>
-                    <a:pt x="5300066" y="3076842"/>
-                  </a:lnTo>
-                  <a:lnTo>
-                    <a:pt x="5228444" y="3065400"/>
-                  </a:lnTo>
-                  <a:lnTo>
-                    <a:pt x="5156821" y="3053635"/>
-                  </a:lnTo>
-                  <a:lnTo>
-                    <a:pt x="5085199" y="3041540"/>
-                  </a:lnTo>
-                  <a:lnTo>
-                    <a:pt x="5013576" y="3029105"/>
-                  </a:lnTo>
-                  <a:lnTo>
-                    <a:pt x="4941954" y="3016320"/>
-                  </a:lnTo>
-                  <a:lnTo>
-                    <a:pt x="4870331" y="3003176"/>
-                  </a:lnTo>
-                  <a:lnTo>
-                    <a:pt x="4798709" y="2989661"/>
-                  </a:lnTo>
-                  <a:lnTo>
-                    <a:pt x="4727086" y="2975767"/>
-                  </a:lnTo>
-                  <a:lnTo>
-                    <a:pt x="4655464" y="2961483"/>
-                  </a:lnTo>
-                  <a:lnTo>
-                    <a:pt x="4583841" y="2946796"/>
-                  </a:lnTo>
-                  <a:lnTo>
-                    <a:pt x="4512219" y="2931696"/>
-                  </a:lnTo>
-                  <a:lnTo>
-                    <a:pt x="4440596" y="2916172"/>
-                  </a:lnTo>
-                  <a:lnTo>
-                    <a:pt x="4368974" y="2900212"/>
-                  </a:lnTo>
-                  <a:lnTo>
-                    <a:pt x="4297351" y="2883802"/>
-                  </a:lnTo>
-                  <a:lnTo>
-                    <a:pt x="4225729" y="2866931"/>
-                  </a:lnTo>
-                  <a:lnTo>
-                    <a:pt x="4154106" y="2849586"/>
-                  </a:lnTo>
-                  <a:lnTo>
-                    <a:pt x="4082483" y="2831753"/>
-                  </a:lnTo>
-                  <a:lnTo>
-                    <a:pt x="4010861" y="2813418"/>
-                  </a:lnTo>
-                  <a:lnTo>
-                    <a:pt x="3939238" y="2794568"/>
-                  </a:lnTo>
-                  <a:lnTo>
-                    <a:pt x="3867616" y="2775187"/>
-                  </a:lnTo>
-                  <a:lnTo>
-                    <a:pt x="3795993" y="2755262"/>
-                  </a:lnTo>
-                  <a:lnTo>
-                    <a:pt x="3724371" y="2734776"/>
-                  </a:lnTo>
-                  <a:lnTo>
-                    <a:pt x="3652748" y="2713715"/>
-                  </a:lnTo>
-                  <a:lnTo>
-                    <a:pt x="3581126" y="2692061"/>
-                  </a:lnTo>
-                  <a:lnTo>
-                    <a:pt x="3509503" y="2669798"/>
-                  </a:lnTo>
-                  <a:lnTo>
-                    <a:pt x="3437881" y="2664718"/>
-                  </a:lnTo>
-                  <a:lnTo>
-                    <a:pt x="3366258" y="2696572"/>
-                  </a:lnTo>
-                  <a:lnTo>
-                    <a:pt x="3294636" y="2727187"/>
-                  </a:lnTo>
-                  <a:lnTo>
-                    <a:pt x="3223013" y="2756612"/>
-                  </a:lnTo>
-                  <a:lnTo>
-                    <a:pt x="3151391" y="2784892"/>
-                  </a:lnTo>
-                  <a:lnTo>
-                    <a:pt x="3079768" y="2812072"/>
-                  </a:lnTo>
-                  <a:lnTo>
-                    <a:pt x="3008146" y="2838195"/>
-                  </a:lnTo>
-                  <a:lnTo>
-                    <a:pt x="2936523" y="2863302"/>
-                  </a:lnTo>
-                  <a:lnTo>
-                    <a:pt x="2864901" y="2887433"/>
-                  </a:lnTo>
-                  <a:lnTo>
-                    <a:pt x="2793278" y="2910625"/>
-                  </a:lnTo>
-                  <a:lnTo>
-                    <a:pt x="2721655" y="2932915"/>
-                  </a:lnTo>
-                  <a:lnTo>
-                    <a:pt x="2650033" y="2954338"/>
-                  </a:lnTo>
-                  <a:lnTo>
-                    <a:pt x="2578410" y="2974928"/>
-                  </a:lnTo>
-                  <a:lnTo>
-                    <a:pt x="2506788" y="2994717"/>
-                  </a:lnTo>
-                  <a:lnTo>
-                    <a:pt x="2435165" y="3013737"/>
-                  </a:lnTo>
-                  <a:lnTo>
-                    <a:pt x="2363543" y="3032017"/>
-                  </a:lnTo>
-                  <a:lnTo>
-                    <a:pt x="2291920" y="3049585"/>
-                  </a:lnTo>
-                  <a:lnTo>
-                    <a:pt x="2220298" y="3066471"/>
-                  </a:lnTo>
-                  <a:lnTo>
-                    <a:pt x="2148675" y="3082700"/>
-                  </a:lnTo>
-                  <a:lnTo>
-                    <a:pt x="2077053" y="3098298"/>
-                  </a:lnTo>
-                  <a:lnTo>
-                    <a:pt x="2005430" y="3113289"/>
-                  </a:lnTo>
-                  <a:lnTo>
-                    <a:pt x="1933808" y="3127697"/>
-                  </a:lnTo>
-                  <a:lnTo>
-                    <a:pt x="1862185" y="3141544"/>
-                  </a:lnTo>
-                  <a:lnTo>
-                    <a:pt x="1790563" y="3154853"/>
-                  </a:lnTo>
-                  <a:lnTo>
-                    <a:pt x="1718940" y="3167645"/>
-                  </a:lnTo>
-                  <a:lnTo>
-                    <a:pt x="1647318" y="3179939"/>
-                  </a:lnTo>
-                  <a:lnTo>
-                    <a:pt x="1575695" y="3191755"/>
-                  </a:lnTo>
-                  <a:lnTo>
-                    <a:pt x="1504073" y="3203111"/>
-                  </a:lnTo>
-                  <a:lnTo>
-                    <a:pt x="1432450" y="3214025"/>
-                  </a:lnTo>
-                  <a:lnTo>
-                    <a:pt x="1360827" y="3224516"/>
-                  </a:lnTo>
-                  <a:lnTo>
-                    <a:pt x="1289205" y="3234598"/>
-                  </a:lnTo>
-                  <a:lnTo>
-                    <a:pt x="1217582" y="3244288"/>
-                  </a:lnTo>
-                  <a:lnTo>
-                    <a:pt x="1145960" y="3253601"/>
-                  </a:lnTo>
-                  <a:lnTo>
-                    <a:pt x="1074337" y="3262552"/>
-                  </a:lnTo>
-                  <a:lnTo>
-                    <a:pt x="1002715" y="3271155"/>
-                  </a:lnTo>
-                  <a:lnTo>
-                    <a:pt x="931092" y="3279423"/>
-                  </a:lnTo>
-                  <a:lnTo>
-                    <a:pt x="859470" y="3287369"/>
-                  </a:lnTo>
-                  <a:lnTo>
-                    <a:pt x="787847" y="3295007"/>
-                  </a:lnTo>
-                  <a:lnTo>
-                    <a:pt x="716225" y="3302348"/>
-                  </a:lnTo>
-                  <a:lnTo>
-                    <a:pt x="644602" y="3309403"/>
-                  </a:lnTo>
-                  <a:lnTo>
-                    <a:pt x="572980" y="3316183"/>
-                  </a:lnTo>
-                  <a:lnTo>
-                    <a:pt x="501357" y="3322700"/>
-                  </a:lnTo>
-                  <a:lnTo>
-                    <a:pt x="429735" y="3328964"/>
-                  </a:lnTo>
-                  <a:lnTo>
-                    <a:pt x="358112" y="3334984"/>
-                  </a:lnTo>
-                  <a:lnTo>
-                    <a:pt x="286490" y="3340769"/>
-                  </a:lnTo>
-                  <a:lnTo>
-                    <a:pt x="214867" y="3346330"/>
-                  </a:lnTo>
-                  <a:lnTo>
-                    <a:pt x="143245" y="3351674"/>
-                  </a:lnTo>
-                  <a:lnTo>
-                    <a:pt x="71622" y="3356811"/>
-                  </a:lnTo>
-                  <a:lnTo>
-                    <a:pt x="0" y="3361748"/>
+                    <a:pt x="7090630" y="3279589"/>
+                  </a:lnTo>
+                  <a:lnTo>
+                    <a:pt x="7019007" y="3273838"/>
+                  </a:lnTo>
+                  <a:lnTo>
+                    <a:pt x="6947385" y="3267925"/>
+                  </a:lnTo>
+                  <a:lnTo>
+                    <a:pt x="6875762" y="3261845"/>
+                  </a:lnTo>
+                  <a:lnTo>
+                    <a:pt x="6804139" y="3255594"/>
+                  </a:lnTo>
+                  <a:lnTo>
+                    <a:pt x="6732517" y="3249166"/>
+                  </a:lnTo>
+                  <a:lnTo>
+                    <a:pt x="6660894" y="3242558"/>
+                  </a:lnTo>
+                  <a:lnTo>
+                    <a:pt x="6589272" y="3235763"/>
+                  </a:lnTo>
+                  <a:lnTo>
+                    <a:pt x="6517649" y="3228778"/>
+                  </a:lnTo>
+                  <a:lnTo>
+                    <a:pt x="6446027" y="3221595"/>
+                  </a:lnTo>
+                  <a:lnTo>
+                    <a:pt x="6374404" y="3214210"/>
+                  </a:lnTo>
+                  <a:lnTo>
+                    <a:pt x="6302782" y="3206617"/>
+                  </a:lnTo>
+                  <a:lnTo>
+                    <a:pt x="6231159" y="3198810"/>
+                  </a:lnTo>
+                  <a:lnTo>
+                    <a:pt x="6159537" y="3190783"/>
+                  </a:lnTo>
+                  <a:lnTo>
+                    <a:pt x="6087914" y="3182529"/>
+                  </a:lnTo>
+                  <a:lnTo>
+                    <a:pt x="6016292" y="3174044"/>
+                  </a:lnTo>
+                  <a:lnTo>
+                    <a:pt x="5944669" y="3165319"/>
+                  </a:lnTo>
+                  <a:lnTo>
+                    <a:pt x="5873047" y="3156349"/>
+                  </a:lnTo>
+                  <a:lnTo>
+                    <a:pt x="5801424" y="3147126"/>
+                  </a:lnTo>
+                  <a:lnTo>
+                    <a:pt x="5729802" y="3137643"/>
+                  </a:lnTo>
+                  <a:lnTo>
+                    <a:pt x="5658179" y="3127893"/>
+                  </a:lnTo>
+                  <a:lnTo>
+                    <a:pt x="5586557" y="3117868"/>
+                  </a:lnTo>
+                  <a:lnTo>
+                    <a:pt x="5514934" y="3107561"/>
+                  </a:lnTo>
+                  <a:lnTo>
+                    <a:pt x="5443311" y="3096963"/>
+                  </a:lnTo>
+                  <a:lnTo>
+                    <a:pt x="5371689" y="3086067"/>
+                  </a:lnTo>
+                  <a:lnTo>
+                    <a:pt x="5300066" y="3074864"/>
+                  </a:lnTo>
+                  <a:lnTo>
+                    <a:pt x="5228444" y="3063345"/>
+                  </a:lnTo>
+                  <a:lnTo>
+                    <a:pt x="5156821" y="3051502"/>
+                  </a:lnTo>
+                  <a:lnTo>
+                    <a:pt x="5085199" y="3039325"/>
+                  </a:lnTo>
+                  <a:lnTo>
+                    <a:pt x="5013576" y="3026806"/>
+                  </a:lnTo>
+                  <a:lnTo>
+                    <a:pt x="4941954" y="3013933"/>
+                  </a:lnTo>
+                  <a:lnTo>
+                    <a:pt x="4870331" y="3000698"/>
+                  </a:lnTo>
+                  <a:lnTo>
+                    <a:pt x="4798709" y="2987090"/>
+                  </a:lnTo>
+                  <a:lnTo>
+                    <a:pt x="4727086" y="2973099"/>
+                  </a:lnTo>
+                  <a:lnTo>
+                    <a:pt x="4655464" y="2958713"/>
+                  </a:lnTo>
+                  <a:lnTo>
+                    <a:pt x="4583841" y="2943922"/>
+                  </a:lnTo>
+                  <a:lnTo>
+                    <a:pt x="4512219" y="2928715"/>
+                  </a:lnTo>
+                  <a:lnTo>
+                    <a:pt x="4440596" y="2913079"/>
+                  </a:lnTo>
+                  <a:lnTo>
+                    <a:pt x="4368974" y="2897003"/>
+                  </a:lnTo>
+                  <a:lnTo>
+                    <a:pt x="4297351" y="2880474"/>
+                  </a:lnTo>
+                  <a:lnTo>
+                    <a:pt x="4225729" y="2863479"/>
+                  </a:lnTo>
+                  <a:lnTo>
+                    <a:pt x="4154106" y="2846005"/>
+                  </a:lnTo>
+                  <a:lnTo>
+                    <a:pt x="4082483" y="2828039"/>
+                  </a:lnTo>
+                  <a:lnTo>
+                    <a:pt x="4010861" y="2809568"/>
+                  </a:lnTo>
+                  <a:lnTo>
+                    <a:pt x="3939238" y="2790575"/>
+                  </a:lnTo>
+                  <a:lnTo>
+                    <a:pt x="3867616" y="2771048"/>
+                  </a:lnTo>
+                  <a:lnTo>
+                    <a:pt x="3795993" y="2750970"/>
+                  </a:lnTo>
+                  <a:lnTo>
+                    <a:pt x="3724371" y="2730327"/>
+                  </a:lnTo>
+                  <a:lnTo>
+                    <a:pt x="3652748" y="2709103"/>
+                  </a:lnTo>
+                  <a:lnTo>
+                    <a:pt x="3581126" y="2687280"/>
+                  </a:lnTo>
+                  <a:lnTo>
+                    <a:pt x="3509503" y="2664843"/>
+                  </a:lnTo>
+                  <a:lnTo>
+                    <a:pt x="3437881" y="2671854"/>
+                  </a:lnTo>
+                  <a:lnTo>
+                    <a:pt x="3366258" y="2703485"/>
+                  </a:lnTo>
+                  <a:lnTo>
+                    <a:pt x="3294636" y="2733883"/>
+                  </a:lnTo>
+                  <a:lnTo>
+                    <a:pt x="3223013" y="2763098"/>
+                  </a:lnTo>
+                  <a:lnTo>
+                    <a:pt x="3151391" y="2791174"/>
+                  </a:lnTo>
+                  <a:lnTo>
+                    <a:pt x="3079768" y="2818156"/>
+                  </a:lnTo>
+                  <a:lnTo>
+                    <a:pt x="3008146" y="2844087"/>
+                  </a:lnTo>
+                  <a:lnTo>
+                    <a:pt x="2936523" y="2869008"/>
+                  </a:lnTo>
+                  <a:lnTo>
+                    <a:pt x="2864901" y="2892958"/>
+                  </a:lnTo>
+                  <a:lnTo>
+                    <a:pt x="2793278" y="2915975"/>
+                  </a:lnTo>
+                  <a:lnTo>
+                    <a:pt x="2721655" y="2938095"/>
+                  </a:lnTo>
+                  <a:lnTo>
+                    <a:pt x="2650033" y="2959353"/>
+                  </a:lnTo>
+                  <a:lnTo>
+                    <a:pt x="2578410" y="2979783"/>
+                  </a:lnTo>
+                  <a:lnTo>
+                    <a:pt x="2506788" y="2999417"/>
+                  </a:lnTo>
+                  <a:lnTo>
+                    <a:pt x="2435165" y="3018287"/>
+                  </a:lnTo>
+                  <a:lnTo>
+                    <a:pt x="2363543" y="3036421"/>
+                  </a:lnTo>
+                  <a:lnTo>
+                    <a:pt x="2291920" y="3053848"/>
+                  </a:lnTo>
+                  <a:lnTo>
+                    <a:pt x="2220298" y="3070597"/>
+                  </a:lnTo>
+                  <a:lnTo>
+                    <a:pt x="2148675" y="3086693"/>
+                  </a:lnTo>
+                  <a:lnTo>
+                    <a:pt x="2077053" y="3102162"/>
+                  </a:lnTo>
+                  <a:lnTo>
+                    <a:pt x="2005430" y="3117028"/>
+                  </a:lnTo>
+                  <a:lnTo>
+                    <a:pt x="1933808" y="3131315"/>
+                  </a:lnTo>
+                  <a:lnTo>
+                    <a:pt x="1862185" y="3145046"/>
+                  </a:lnTo>
+                  <a:lnTo>
+                    <a:pt x="1790563" y="3158242"/>
+                  </a:lnTo>
+                  <a:lnTo>
+                    <a:pt x="1718940" y="3170923"/>
+                  </a:lnTo>
+                  <a:lnTo>
+                    <a:pt x="1647318" y="3183111"/>
+                  </a:lnTo>
+                  <a:lnTo>
+                    <a:pt x="1575695" y="3194823"/>
+                  </a:lnTo>
+                  <a:lnTo>
+                    <a:pt x="1504073" y="3206079"/>
+                  </a:lnTo>
+                  <a:lnTo>
+                    <a:pt x="1432450" y="3216897"/>
+                  </a:lnTo>
+                  <a:lnTo>
+                    <a:pt x="1360827" y="3227294"/>
+                  </a:lnTo>
+                  <a:lnTo>
+                    <a:pt x="1289205" y="3237285"/>
+                  </a:lnTo>
+                  <a:lnTo>
+                    <a:pt x="1217582" y="3246887"/>
+                  </a:lnTo>
+                  <a:lnTo>
+                    <a:pt x="1145960" y="3256115"/>
+                  </a:lnTo>
+                  <a:lnTo>
+                    <a:pt x="1074337" y="3264983"/>
+                  </a:lnTo>
+                  <a:lnTo>
+                    <a:pt x="1002715" y="3273506"/>
+                  </a:lnTo>
+                  <a:lnTo>
+                    <a:pt x="931092" y="3281697"/>
+                  </a:lnTo>
+                  <a:lnTo>
+                    <a:pt x="859470" y="3289569"/>
+                  </a:lnTo>
+                  <a:lnTo>
+                    <a:pt x="787847" y="3297134"/>
+                  </a:lnTo>
+                  <a:lnTo>
+                    <a:pt x="716225" y="3304404"/>
+                  </a:lnTo>
+                  <a:lnTo>
+                    <a:pt x="644602" y="3311391"/>
+                  </a:lnTo>
+                  <a:lnTo>
+                    <a:pt x="572980" y="3318106"/>
+                  </a:lnTo>
+                  <a:lnTo>
+                    <a:pt x="501357" y="3324559"/>
+                  </a:lnTo>
+                  <a:lnTo>
+                    <a:pt x="429735" y="3330761"/>
+                  </a:lnTo>
+                  <a:lnTo>
+                    <a:pt x="358112" y="3336721"/>
+                  </a:lnTo>
+                  <a:lnTo>
+                    <a:pt x="286490" y="3342449"/>
+                  </a:lnTo>
+                  <a:lnTo>
+                    <a:pt x="214867" y="3347954"/>
+                  </a:lnTo>
+                  <a:lnTo>
+                    <a:pt x="143245" y="3353245"/>
+                  </a:lnTo>
+                  <a:lnTo>
+                    <a:pt x="71622" y="3358329"/>
+                  </a:lnTo>
+                  <a:lnTo>
+                    <a:pt x="0" y="3363215"/>
                   </a:lnTo>
                   <a:close/>
                 </a:path>
@@ -3638,269 +3638,269 @@
           <p:spPr>
             <a:xfrm>
               <a:off x="1172049" y="2073503"/>
-              <a:ext cx="6051438" cy="2646909"/>
+              <a:ext cx="6062651" cy="2641773"/>
             </a:xfrm>
             <a:custGeom>
               <a:avLst/>
               <a:pathLst>
-                <a:path w="6051438" h="2646909">
+                <a:path w="6062651" h="2641773">
                   <a:moveTo>
-                    <a:pt x="0" y="315912"/>
+                    <a:pt x="0" y="289003"/>
                   </a:moveTo>
                   <a:lnTo>
-                    <a:pt x="71622" y="402558"/>
-                  </a:lnTo>
-                  <a:lnTo>
-                    <a:pt x="143245" y="486834"/>
-                  </a:lnTo>
-                  <a:lnTo>
-                    <a:pt x="214867" y="568804"/>
-                  </a:lnTo>
-                  <a:lnTo>
-                    <a:pt x="286490" y="648533"/>
-                  </a:lnTo>
-                  <a:lnTo>
-                    <a:pt x="358112" y="726081"/>
-                  </a:lnTo>
-                  <a:lnTo>
-                    <a:pt x="429735" y="801508"/>
-                  </a:lnTo>
-                  <a:lnTo>
-                    <a:pt x="501357" y="874872"/>
-                  </a:lnTo>
-                  <a:lnTo>
-                    <a:pt x="572980" y="946229"/>
-                  </a:lnTo>
-                  <a:lnTo>
-                    <a:pt x="644602" y="1015635"/>
-                  </a:lnTo>
-                  <a:lnTo>
-                    <a:pt x="716225" y="1083142"/>
-                  </a:lnTo>
-                  <a:lnTo>
-                    <a:pt x="787847" y="1148803"/>
-                  </a:lnTo>
-                  <a:lnTo>
-                    <a:pt x="859470" y="1212668"/>
-                  </a:lnTo>
-                  <a:lnTo>
-                    <a:pt x="931092" y="1274786"/>
-                  </a:lnTo>
-                  <a:lnTo>
-                    <a:pt x="1002715" y="1335205"/>
-                  </a:lnTo>
-                  <a:lnTo>
-                    <a:pt x="1074337" y="1393971"/>
-                  </a:lnTo>
-                  <a:lnTo>
-                    <a:pt x="1145960" y="1451130"/>
-                  </a:lnTo>
-                  <a:lnTo>
-                    <a:pt x="1217582" y="1506726"/>
-                  </a:lnTo>
-                  <a:lnTo>
-                    <a:pt x="1289205" y="1560801"/>
-                  </a:lnTo>
-                  <a:lnTo>
-                    <a:pt x="1360827" y="1613397"/>
-                  </a:lnTo>
-                  <a:lnTo>
-                    <a:pt x="1432450" y="1664554"/>
-                  </a:lnTo>
-                  <a:lnTo>
-                    <a:pt x="1504073" y="1714312"/>
-                  </a:lnTo>
-                  <a:lnTo>
-                    <a:pt x="1575695" y="1762709"/>
-                  </a:lnTo>
-                  <a:lnTo>
-                    <a:pt x="1647318" y="1809783"/>
-                  </a:lnTo>
-                  <a:lnTo>
-                    <a:pt x="1718940" y="1855568"/>
-                  </a:lnTo>
-                  <a:lnTo>
-                    <a:pt x="1790563" y="1900102"/>
-                  </a:lnTo>
-                  <a:lnTo>
-                    <a:pt x="1862185" y="1943417"/>
-                  </a:lnTo>
-                  <a:lnTo>
-                    <a:pt x="1933808" y="1985548"/>
-                  </a:lnTo>
-                  <a:lnTo>
-                    <a:pt x="2005430" y="2026526"/>
-                  </a:lnTo>
-                  <a:lnTo>
-                    <a:pt x="2077053" y="2066384"/>
-                  </a:lnTo>
-                  <a:lnTo>
-                    <a:pt x="2148675" y="2105151"/>
-                  </a:lnTo>
-                  <a:lnTo>
-                    <a:pt x="2220298" y="2142858"/>
-                  </a:lnTo>
-                  <a:lnTo>
-                    <a:pt x="2291920" y="2179534"/>
-                  </a:lnTo>
-                  <a:lnTo>
-                    <a:pt x="2363543" y="2215206"/>
-                  </a:lnTo>
-                  <a:lnTo>
-                    <a:pt x="2435165" y="2249903"/>
-                  </a:lnTo>
-                  <a:lnTo>
-                    <a:pt x="2506788" y="2283651"/>
-                  </a:lnTo>
-                  <a:lnTo>
-                    <a:pt x="2578410" y="2316476"/>
-                  </a:lnTo>
-                  <a:lnTo>
-                    <a:pt x="2650033" y="2348403"/>
-                  </a:lnTo>
-                  <a:lnTo>
-                    <a:pt x="2721655" y="2379456"/>
-                  </a:lnTo>
-                  <a:lnTo>
-                    <a:pt x="2793278" y="2409661"/>
-                  </a:lnTo>
-                  <a:lnTo>
-                    <a:pt x="2864901" y="2439039"/>
-                  </a:lnTo>
-                  <a:lnTo>
-                    <a:pt x="2936523" y="2467613"/>
-                  </a:lnTo>
-                  <a:lnTo>
-                    <a:pt x="3008146" y="2495406"/>
-                  </a:lnTo>
-                  <a:lnTo>
-                    <a:pt x="3079768" y="2522439"/>
-                  </a:lnTo>
-                  <a:lnTo>
-                    <a:pt x="3151391" y="2548733"/>
-                  </a:lnTo>
-                  <a:lnTo>
-                    <a:pt x="3223013" y="2574307"/>
-                  </a:lnTo>
-                  <a:lnTo>
-                    <a:pt x="3294636" y="2599182"/>
-                  </a:lnTo>
-                  <a:lnTo>
-                    <a:pt x="3366258" y="2623376"/>
-                  </a:lnTo>
-                  <a:lnTo>
-                    <a:pt x="3437881" y="2646909"/>
-                  </a:lnTo>
-                  <a:lnTo>
-                    <a:pt x="3509503" y="2631575"/>
-                  </a:lnTo>
-                  <a:lnTo>
-                    <a:pt x="3581126" y="2597091"/>
-                  </a:lnTo>
-                  <a:lnTo>
-                    <a:pt x="3652748" y="2561211"/>
-                  </a:lnTo>
-                  <a:lnTo>
-                    <a:pt x="3724371" y="2523880"/>
-                  </a:lnTo>
-                  <a:lnTo>
-                    <a:pt x="3795993" y="2485037"/>
-                  </a:lnTo>
-                  <a:lnTo>
-                    <a:pt x="3867616" y="2444623"/>
-                  </a:lnTo>
-                  <a:lnTo>
-                    <a:pt x="3939238" y="2402574"/>
-                  </a:lnTo>
-                  <a:lnTo>
-                    <a:pt x="4010861" y="2358823"/>
-                  </a:lnTo>
-                  <a:lnTo>
-                    <a:pt x="4082483" y="2313302"/>
-                  </a:lnTo>
-                  <a:lnTo>
-                    <a:pt x="4154106" y="2265938"/>
-                  </a:lnTo>
-                  <a:lnTo>
-                    <a:pt x="4225729" y="2216658"/>
-                  </a:lnTo>
-                  <a:lnTo>
-                    <a:pt x="4297351" y="2165383"/>
-                  </a:lnTo>
-                  <a:lnTo>
-                    <a:pt x="4368974" y="2112034"/>
-                  </a:lnTo>
-                  <a:lnTo>
-                    <a:pt x="4440596" y="2056526"/>
-                  </a:lnTo>
-                  <a:lnTo>
-                    <a:pt x="4512219" y="1998772"/>
-                  </a:lnTo>
-                  <a:lnTo>
-                    <a:pt x="4583841" y="1938680"/>
-                  </a:lnTo>
-                  <a:lnTo>
-                    <a:pt x="4655464" y="1876157"/>
-                  </a:lnTo>
-                  <a:lnTo>
-                    <a:pt x="4727086" y="1811104"/>
-                  </a:lnTo>
-                  <a:lnTo>
-                    <a:pt x="4798709" y="1743419"/>
-                  </a:lnTo>
-                  <a:lnTo>
-                    <a:pt x="4870331" y="1672994"/>
-                  </a:lnTo>
-                  <a:lnTo>
-                    <a:pt x="4941954" y="1599720"/>
-                  </a:lnTo>
-                  <a:lnTo>
-                    <a:pt x="5013576" y="1523480"/>
-                  </a:lnTo>
-                  <a:lnTo>
-                    <a:pt x="5085199" y="1444155"/>
-                  </a:lnTo>
-                  <a:lnTo>
-                    <a:pt x="5156821" y="1361621"/>
-                  </a:lnTo>
-                  <a:lnTo>
-                    <a:pt x="5228444" y="1275746"/>
-                  </a:lnTo>
-                  <a:lnTo>
-                    <a:pt x="5300066" y="1186397"/>
-                  </a:lnTo>
-                  <a:lnTo>
-                    <a:pt x="5371689" y="1093432"/>
-                  </a:lnTo>
-                  <a:lnTo>
-                    <a:pt x="5443311" y="996704"/>
-                  </a:lnTo>
-                  <a:lnTo>
-                    <a:pt x="5514934" y="896063"/>
-                  </a:lnTo>
-                  <a:lnTo>
-                    <a:pt x="5586557" y="791349"/>
-                  </a:lnTo>
-                  <a:lnTo>
-                    <a:pt x="5658179" y="682398"/>
-                  </a:lnTo>
-                  <a:lnTo>
-                    <a:pt x="5729802" y="569038"/>
-                  </a:lnTo>
-                  <a:lnTo>
-                    <a:pt x="5801424" y="451090"/>
-                  </a:lnTo>
-                  <a:lnTo>
-                    <a:pt x="5873047" y="328370"/>
-                  </a:lnTo>
-                  <a:lnTo>
-                    <a:pt x="5944669" y="200684"/>
-                  </a:lnTo>
-                  <a:lnTo>
-                    <a:pt x="6016292" y="67830"/>
-                  </a:lnTo>
-                  <a:lnTo>
-                    <a:pt x="6051438" y="0"/>
+                    <a:pt x="71622" y="376536"/>
+                  </a:lnTo>
+                  <a:lnTo>
+                    <a:pt x="143245" y="461671"/>
+                  </a:lnTo>
+                  <a:lnTo>
+                    <a:pt x="214867" y="544474"/>
+                  </a:lnTo>
+                  <a:lnTo>
+                    <a:pt x="286490" y="625008"/>
+                  </a:lnTo>
+                  <a:lnTo>
+                    <a:pt x="358112" y="703335"/>
+                  </a:lnTo>
+                  <a:lnTo>
+                    <a:pt x="429735" y="779516"/>
+                  </a:lnTo>
+                  <a:lnTo>
+                    <a:pt x="501357" y="853609"/>
+                  </a:lnTo>
+                  <a:lnTo>
+                    <a:pt x="572980" y="925673"/>
+                  </a:lnTo>
+                  <a:lnTo>
+                    <a:pt x="644602" y="995762"/>
+                  </a:lnTo>
+                  <a:lnTo>
+                    <a:pt x="716225" y="1063931"/>
+                  </a:lnTo>
+                  <a:lnTo>
+                    <a:pt x="787847" y="1130232"/>
+                  </a:lnTo>
+                  <a:lnTo>
+                    <a:pt x="859470" y="1194716"/>
+                  </a:lnTo>
+                  <a:lnTo>
+                    <a:pt x="931092" y="1257434"/>
+                  </a:lnTo>
+                  <a:lnTo>
+                    <a:pt x="1002715" y="1318433"/>
+                  </a:lnTo>
+                  <a:lnTo>
+                    <a:pt x="1074337" y="1377761"/>
+                  </a:lnTo>
+                  <a:lnTo>
+                    <a:pt x="1145960" y="1435463"/>
+                  </a:lnTo>
+                  <a:lnTo>
+                    <a:pt x="1217582" y="1491584"/>
+                  </a:lnTo>
+                  <a:lnTo>
+                    <a:pt x="1289205" y="1546168"/>
+                  </a:lnTo>
+                  <a:lnTo>
+                    <a:pt x="1360827" y="1599256"/>
+                  </a:lnTo>
+                  <a:lnTo>
+                    <a:pt x="1432450" y="1650890"/>
+                  </a:lnTo>
+                  <a:lnTo>
+                    <a:pt x="1504073" y="1701108"/>
+                  </a:lnTo>
+                  <a:lnTo>
+                    <a:pt x="1575695" y="1749951"/>
+                  </a:lnTo>
+                  <a:lnTo>
+                    <a:pt x="1647318" y="1797456"/>
+                  </a:lnTo>
+                  <a:lnTo>
+                    <a:pt x="1718940" y="1843659"/>
+                  </a:lnTo>
+                  <a:lnTo>
+                    <a:pt x="1790563" y="1888596"/>
+                  </a:lnTo>
+                  <a:lnTo>
+                    <a:pt x="1862185" y="1932302"/>
+                  </a:lnTo>
+                  <a:lnTo>
+                    <a:pt x="1933808" y="1974810"/>
+                  </a:lnTo>
+                  <a:lnTo>
+                    <a:pt x="2005430" y="2016154"/>
+                  </a:lnTo>
+                  <a:lnTo>
+                    <a:pt x="2077053" y="2056364"/>
+                  </a:lnTo>
+                  <a:lnTo>
+                    <a:pt x="2148675" y="2095474"/>
+                  </a:lnTo>
+                  <a:lnTo>
+                    <a:pt x="2220298" y="2133511"/>
+                  </a:lnTo>
+                  <a:lnTo>
+                    <a:pt x="2291920" y="2170506"/>
+                  </a:lnTo>
+                  <a:lnTo>
+                    <a:pt x="2363543" y="2206488"/>
+                  </a:lnTo>
+                  <a:lnTo>
+                    <a:pt x="2435165" y="2241484"/>
+                  </a:lnTo>
+                  <a:lnTo>
+                    <a:pt x="2506788" y="2275521"/>
+                  </a:lnTo>
+                  <a:lnTo>
+                    <a:pt x="2578410" y="2308625"/>
+                  </a:lnTo>
+                  <a:lnTo>
+                    <a:pt x="2650033" y="2340823"/>
+                  </a:lnTo>
+                  <a:lnTo>
+                    <a:pt x="2721655" y="2372138"/>
+                  </a:lnTo>
+                  <a:lnTo>
+                    <a:pt x="2793278" y="2402595"/>
+                  </a:lnTo>
+                  <a:lnTo>
+                    <a:pt x="2864901" y="2432218"/>
+                  </a:lnTo>
+                  <a:lnTo>
+                    <a:pt x="2936523" y="2461029"/>
+                  </a:lnTo>
+                  <a:lnTo>
+                    <a:pt x="3008146" y="2489050"/>
+                  </a:lnTo>
+                  <a:lnTo>
+                    <a:pt x="3079768" y="2516304"/>
+                  </a:lnTo>
+                  <a:lnTo>
+                    <a:pt x="3151391" y="2542811"/>
+                  </a:lnTo>
+                  <a:lnTo>
+                    <a:pt x="3223013" y="2568592"/>
+                  </a:lnTo>
+                  <a:lnTo>
+                    <a:pt x="3294636" y="2593667"/>
+                  </a:lnTo>
+                  <a:lnTo>
+                    <a:pt x="3366258" y="2618054"/>
+                  </a:lnTo>
+                  <a:lnTo>
+                    <a:pt x="3437881" y="2641773"/>
+                  </a:lnTo>
+                  <a:lnTo>
+                    <a:pt x="3509503" y="2638941"/>
+                  </a:lnTo>
+                  <a:lnTo>
+                    <a:pt x="3581126" y="2604693"/>
+                  </a:lnTo>
+                  <a:lnTo>
+                    <a:pt x="3652748" y="2569057"/>
+                  </a:lnTo>
+                  <a:lnTo>
+                    <a:pt x="3724371" y="2531977"/>
+                  </a:lnTo>
+                  <a:lnTo>
+                    <a:pt x="3795993" y="2493393"/>
+                  </a:lnTo>
+                  <a:lnTo>
+                    <a:pt x="3867616" y="2453245"/>
+                  </a:lnTo>
+                  <a:lnTo>
+                    <a:pt x="3939238" y="2411470"/>
+                  </a:lnTo>
+                  <a:lnTo>
+                    <a:pt x="4010861" y="2368001"/>
+                  </a:lnTo>
+                  <a:lnTo>
+                    <a:pt x="4082483" y="2322770"/>
+                  </a:lnTo>
+                  <a:lnTo>
+                    <a:pt x="4154106" y="2275706"/>
+                  </a:lnTo>
+                  <a:lnTo>
+                    <a:pt x="4225729" y="2226733"/>
+                  </a:lnTo>
+                  <a:lnTo>
+                    <a:pt x="4297351" y="2175775"/>
+                  </a:lnTo>
+                  <a:lnTo>
+                    <a:pt x="4368974" y="2122751"/>
+                  </a:lnTo>
+                  <a:lnTo>
+                    <a:pt x="4440596" y="2067578"/>
+                  </a:lnTo>
+                  <a:lnTo>
+                    <a:pt x="4512219" y="2010168"/>
+                  </a:lnTo>
+                  <a:lnTo>
+                    <a:pt x="4583841" y="1950431"/>
+                  </a:lnTo>
+                  <a:lnTo>
+                    <a:pt x="4655464" y="1888272"/>
+                  </a:lnTo>
+                  <a:lnTo>
+                    <a:pt x="4727086" y="1823593"/>
+                  </a:lnTo>
+                  <a:lnTo>
+                    <a:pt x="4798709" y="1756293"/>
+                  </a:lnTo>
+                  <a:lnTo>
+                    <a:pt x="4870331" y="1686264"/>
+                  </a:lnTo>
+                  <a:lnTo>
+                    <a:pt x="4941954" y="1613396"/>
+                  </a:lnTo>
+                  <a:lnTo>
+                    <a:pt x="5013576" y="1537574"/>
+                  </a:lnTo>
+                  <a:lnTo>
+                    <a:pt x="5085199" y="1458678"/>
+                  </a:lnTo>
+                  <a:lnTo>
+                    <a:pt x="5156821" y="1376584"/>
+                  </a:lnTo>
+                  <a:lnTo>
+                    <a:pt x="5228444" y="1291162"/>
+                  </a:lnTo>
+                  <a:lnTo>
+                    <a:pt x="5300066" y="1202277"/>
+                  </a:lnTo>
+                  <a:lnTo>
+                    <a:pt x="5371689" y="1109789"/>
+                  </a:lnTo>
+                  <a:lnTo>
+                    <a:pt x="5443311" y="1013552"/>
+                  </a:lnTo>
+                  <a:lnTo>
+                    <a:pt x="5514934" y="913413"/>
+                  </a:lnTo>
+                  <a:lnTo>
+                    <a:pt x="5586557" y="809214"/>
+                  </a:lnTo>
+                  <a:lnTo>
+                    <a:pt x="5658179" y="700792"/>
+                  </a:lnTo>
+                  <a:lnTo>
+                    <a:pt x="5729802" y="587974"/>
+                  </a:lnTo>
+                  <a:lnTo>
+                    <a:pt x="5801424" y="470583"/>
+                  </a:lnTo>
+                  <a:lnTo>
+                    <a:pt x="5873047" y="348432"/>
+                  </a:lnTo>
+                  <a:lnTo>
+                    <a:pt x="5944669" y="221330"/>
+                  </a:lnTo>
+                  <a:lnTo>
+                    <a:pt x="6016292" y="89076"/>
+                  </a:lnTo>
+                  <a:lnTo>
+                    <a:pt x="6062651" y="0"/>
                   </a:lnTo>
                 </a:path>
               </a:pathLst>
@@ -3920,312 +3920,312 @@
           </p:nvSpPr>
           <p:spPr>
             <a:xfrm>
-              <a:off x="1172049" y="4738221"/>
-              <a:ext cx="7090630" cy="697029"/>
+              <a:off x="1172049" y="4738346"/>
+              <a:ext cx="7090630" cy="698372"/>
             </a:xfrm>
             <a:custGeom>
               <a:avLst/>
               <a:pathLst>
-                <a:path w="7090630" h="697029">
+                <a:path w="7090630" h="698372">
                   <a:moveTo>
-                    <a:pt x="7090630" y="615611"/>
+                    <a:pt x="7090630" y="614746"/>
                   </a:moveTo>
                   <a:lnTo>
-                    <a:pt x="7019007" y="609890"/>
-                  </a:lnTo>
-                  <a:lnTo>
-                    <a:pt x="6947385" y="604009"/>
-                  </a:lnTo>
-                  <a:lnTo>
-                    <a:pt x="6875762" y="597963"/>
-                  </a:lnTo>
-                  <a:lnTo>
-                    <a:pt x="6804139" y="591746"/>
-                  </a:lnTo>
-                  <a:lnTo>
-                    <a:pt x="6732517" y="585355"/>
-                  </a:lnTo>
-                  <a:lnTo>
-                    <a:pt x="6660894" y="578784"/>
-                  </a:lnTo>
-                  <a:lnTo>
-                    <a:pt x="6589272" y="572028"/>
-                  </a:lnTo>
-                  <a:lnTo>
-                    <a:pt x="6517649" y="565082"/>
-                  </a:lnTo>
-                  <a:lnTo>
-                    <a:pt x="6446027" y="557941"/>
-                  </a:lnTo>
-                  <a:lnTo>
-                    <a:pt x="6374404" y="550599"/>
-                  </a:lnTo>
-                  <a:lnTo>
-                    <a:pt x="6302782" y="543050"/>
-                  </a:lnTo>
-                  <a:lnTo>
-                    <a:pt x="6231159" y="535290"/>
-                  </a:lnTo>
-                  <a:lnTo>
-                    <a:pt x="6159537" y="527311"/>
-                  </a:lnTo>
-                  <a:lnTo>
-                    <a:pt x="6087914" y="519107"/>
-                  </a:lnTo>
-                  <a:lnTo>
-                    <a:pt x="6016292" y="510673"/>
-                  </a:lnTo>
-                  <a:lnTo>
-                    <a:pt x="5944669" y="502002"/>
-                  </a:lnTo>
-                  <a:lnTo>
-                    <a:pt x="5873047" y="493087"/>
-                  </a:lnTo>
-                  <a:lnTo>
-                    <a:pt x="5801424" y="483921"/>
-                  </a:lnTo>
-                  <a:lnTo>
-                    <a:pt x="5729802" y="474498"/>
-                  </a:lnTo>
-                  <a:lnTo>
-                    <a:pt x="5658179" y="464809"/>
-                  </a:lnTo>
-                  <a:lnTo>
-                    <a:pt x="5586557" y="454848"/>
-                  </a:lnTo>
-                  <a:lnTo>
-                    <a:pt x="5514934" y="444607"/>
-                  </a:lnTo>
-                  <a:lnTo>
-                    <a:pt x="5443311" y="434078"/>
-                  </a:lnTo>
-                  <a:lnTo>
-                    <a:pt x="5371689" y="423253"/>
-                  </a:lnTo>
-                  <a:lnTo>
-                    <a:pt x="5300066" y="412124"/>
-                  </a:lnTo>
-                  <a:lnTo>
-                    <a:pt x="5228444" y="400681"/>
-                  </a:lnTo>
-                  <a:lnTo>
-                    <a:pt x="5156821" y="388917"/>
-                  </a:lnTo>
-                  <a:lnTo>
-                    <a:pt x="5085199" y="376822"/>
-                  </a:lnTo>
-                  <a:lnTo>
-                    <a:pt x="5013576" y="364386"/>
-                  </a:lnTo>
-                  <a:lnTo>
-                    <a:pt x="4941954" y="351601"/>
-                  </a:lnTo>
-                  <a:lnTo>
-                    <a:pt x="4870331" y="338457"/>
-                  </a:lnTo>
-                  <a:lnTo>
-                    <a:pt x="4798709" y="324943"/>
-                  </a:lnTo>
-                  <a:lnTo>
-                    <a:pt x="4727086" y="311049"/>
-                  </a:lnTo>
-                  <a:lnTo>
-                    <a:pt x="4655464" y="296764"/>
-                  </a:lnTo>
-                  <a:lnTo>
-                    <a:pt x="4583841" y="282077"/>
-                  </a:lnTo>
-                  <a:lnTo>
-                    <a:pt x="4512219" y="266978"/>
-                  </a:lnTo>
-                  <a:lnTo>
-                    <a:pt x="4440596" y="251454"/>
-                  </a:lnTo>
-                  <a:lnTo>
-                    <a:pt x="4368974" y="235493"/>
-                  </a:lnTo>
-                  <a:lnTo>
-                    <a:pt x="4297351" y="219083"/>
-                  </a:lnTo>
-                  <a:lnTo>
-                    <a:pt x="4225729" y="202212"/>
-                  </a:lnTo>
-                  <a:lnTo>
-                    <a:pt x="4154106" y="184867"/>
-                  </a:lnTo>
-                  <a:lnTo>
-                    <a:pt x="4082483" y="167034"/>
-                  </a:lnTo>
-                  <a:lnTo>
-                    <a:pt x="4010861" y="148699"/>
-                  </a:lnTo>
-                  <a:lnTo>
-                    <a:pt x="3939238" y="129849"/>
-                  </a:lnTo>
-                  <a:lnTo>
-                    <a:pt x="3867616" y="110469"/>
-                  </a:lnTo>
-                  <a:lnTo>
-                    <a:pt x="3795993" y="90543"/>
-                  </a:lnTo>
-                  <a:lnTo>
-                    <a:pt x="3724371" y="70058"/>
-                  </a:lnTo>
-                  <a:lnTo>
-                    <a:pt x="3652748" y="48996"/>
-                  </a:lnTo>
-                  <a:lnTo>
-                    <a:pt x="3581126" y="27342"/>
-                  </a:lnTo>
-                  <a:lnTo>
-                    <a:pt x="3509503" y="5079"/>
-                  </a:lnTo>
-                  <a:lnTo>
-                    <a:pt x="3437881" y="0"/>
-                  </a:lnTo>
-                  <a:lnTo>
-                    <a:pt x="3366258" y="31854"/>
-                  </a:lnTo>
-                  <a:lnTo>
-                    <a:pt x="3294636" y="62469"/>
-                  </a:lnTo>
-                  <a:lnTo>
-                    <a:pt x="3223013" y="91893"/>
-                  </a:lnTo>
-                  <a:lnTo>
-                    <a:pt x="3151391" y="120173"/>
-                  </a:lnTo>
-                  <a:lnTo>
-                    <a:pt x="3079768" y="147353"/>
-                  </a:lnTo>
-                  <a:lnTo>
-                    <a:pt x="3008146" y="173476"/>
-                  </a:lnTo>
-                  <a:lnTo>
-                    <a:pt x="2936523" y="198583"/>
-                  </a:lnTo>
-                  <a:lnTo>
-                    <a:pt x="2864901" y="222714"/>
-                  </a:lnTo>
-                  <a:lnTo>
-                    <a:pt x="2793278" y="245906"/>
-                  </a:lnTo>
-                  <a:lnTo>
-                    <a:pt x="2721655" y="268196"/>
-                  </a:lnTo>
-                  <a:lnTo>
-                    <a:pt x="2650033" y="289619"/>
-                  </a:lnTo>
-                  <a:lnTo>
-                    <a:pt x="2578410" y="310209"/>
-                  </a:lnTo>
-                  <a:lnTo>
-                    <a:pt x="2506788" y="329999"/>
-                  </a:lnTo>
-                  <a:lnTo>
-                    <a:pt x="2435165" y="349018"/>
-                  </a:lnTo>
-                  <a:lnTo>
-                    <a:pt x="2363543" y="367298"/>
-                  </a:lnTo>
-                  <a:lnTo>
-                    <a:pt x="2291920" y="384867"/>
-                  </a:lnTo>
-                  <a:lnTo>
-                    <a:pt x="2220298" y="401752"/>
-                  </a:lnTo>
-                  <a:lnTo>
-                    <a:pt x="2148675" y="417981"/>
-                  </a:lnTo>
-                  <a:lnTo>
-                    <a:pt x="2077053" y="433579"/>
-                  </a:lnTo>
-                  <a:lnTo>
-                    <a:pt x="2005430" y="448570"/>
-                  </a:lnTo>
-                  <a:lnTo>
-                    <a:pt x="1933808" y="462978"/>
-                  </a:lnTo>
-                  <a:lnTo>
-                    <a:pt x="1862185" y="476826"/>
-                  </a:lnTo>
-                  <a:lnTo>
-                    <a:pt x="1790563" y="490135"/>
-                  </a:lnTo>
-                  <a:lnTo>
-                    <a:pt x="1718940" y="502926"/>
-                  </a:lnTo>
-                  <a:lnTo>
-                    <a:pt x="1647318" y="515220"/>
-                  </a:lnTo>
-                  <a:lnTo>
-                    <a:pt x="1575695" y="527036"/>
-                  </a:lnTo>
-                  <a:lnTo>
-                    <a:pt x="1504073" y="538392"/>
-                  </a:lnTo>
-                  <a:lnTo>
-                    <a:pt x="1432450" y="549307"/>
-                  </a:lnTo>
-                  <a:lnTo>
-                    <a:pt x="1360827" y="559797"/>
-                  </a:lnTo>
-                  <a:lnTo>
-                    <a:pt x="1289205" y="569879"/>
-                  </a:lnTo>
-                  <a:lnTo>
-                    <a:pt x="1217582" y="579569"/>
-                  </a:lnTo>
-                  <a:lnTo>
-                    <a:pt x="1145960" y="588882"/>
-                  </a:lnTo>
-                  <a:lnTo>
-                    <a:pt x="1074337" y="597833"/>
-                  </a:lnTo>
-                  <a:lnTo>
-                    <a:pt x="1002715" y="606436"/>
-                  </a:lnTo>
-                  <a:lnTo>
-                    <a:pt x="931092" y="614704"/>
-                  </a:lnTo>
-                  <a:lnTo>
-                    <a:pt x="859470" y="622651"/>
-                  </a:lnTo>
-                  <a:lnTo>
-                    <a:pt x="787847" y="630288"/>
-                  </a:lnTo>
-                  <a:lnTo>
-                    <a:pt x="716225" y="637629"/>
-                  </a:lnTo>
-                  <a:lnTo>
-                    <a:pt x="644602" y="644684"/>
-                  </a:lnTo>
-                  <a:lnTo>
-                    <a:pt x="572980" y="651465"/>
-                  </a:lnTo>
-                  <a:lnTo>
-                    <a:pt x="501357" y="657982"/>
-                  </a:lnTo>
-                  <a:lnTo>
-                    <a:pt x="429735" y="664245"/>
-                  </a:lnTo>
-                  <a:lnTo>
-                    <a:pt x="358112" y="670265"/>
-                  </a:lnTo>
-                  <a:lnTo>
-                    <a:pt x="286490" y="676051"/>
-                  </a:lnTo>
-                  <a:lnTo>
-                    <a:pt x="214867" y="681611"/>
-                  </a:lnTo>
-                  <a:lnTo>
-                    <a:pt x="143245" y="686956"/>
-                  </a:lnTo>
-                  <a:lnTo>
-                    <a:pt x="71622" y="692092"/>
-                  </a:lnTo>
-                  <a:lnTo>
-                    <a:pt x="0" y="697029"/>
+                    <a:pt x="7019007" y="608995"/>
+                  </a:lnTo>
+                  <a:lnTo>
+                    <a:pt x="6947385" y="603081"/>
+                  </a:lnTo>
+                  <a:lnTo>
+                    <a:pt x="6875762" y="597002"/>
+                  </a:lnTo>
+                  <a:lnTo>
+                    <a:pt x="6804139" y="590750"/>
+                  </a:lnTo>
+                  <a:lnTo>
+                    <a:pt x="6732517" y="584323"/>
+                  </a:lnTo>
+                  <a:lnTo>
+                    <a:pt x="6660894" y="577715"/>
+                  </a:lnTo>
+                  <a:lnTo>
+                    <a:pt x="6589272" y="570920"/>
+                  </a:lnTo>
+                  <a:lnTo>
+                    <a:pt x="6517649" y="563934"/>
+                  </a:lnTo>
+                  <a:lnTo>
+                    <a:pt x="6446027" y="556751"/>
+                  </a:lnTo>
+                  <a:lnTo>
+                    <a:pt x="6374404" y="549366"/>
+                  </a:lnTo>
+                  <a:lnTo>
+                    <a:pt x="6302782" y="541773"/>
+                  </a:lnTo>
+                  <a:lnTo>
+                    <a:pt x="6231159" y="533966"/>
+                  </a:lnTo>
+                  <a:lnTo>
+                    <a:pt x="6159537" y="525939"/>
+                  </a:lnTo>
+                  <a:lnTo>
+                    <a:pt x="6087914" y="517686"/>
+                  </a:lnTo>
+                  <a:lnTo>
+                    <a:pt x="6016292" y="509201"/>
+                  </a:lnTo>
+                  <a:lnTo>
+                    <a:pt x="5944669" y="500476"/>
+                  </a:lnTo>
+                  <a:lnTo>
+                    <a:pt x="5873047" y="491505"/>
+                  </a:lnTo>
+                  <a:lnTo>
+                    <a:pt x="5801424" y="482282"/>
+                  </a:lnTo>
+                  <a:lnTo>
+                    <a:pt x="5729802" y="472799"/>
+                  </a:lnTo>
+                  <a:lnTo>
+                    <a:pt x="5658179" y="463049"/>
+                  </a:lnTo>
+                  <a:lnTo>
+                    <a:pt x="5586557" y="453024"/>
+                  </a:lnTo>
+                  <a:lnTo>
+                    <a:pt x="5514934" y="442717"/>
+                  </a:lnTo>
+                  <a:lnTo>
+                    <a:pt x="5443311" y="432120"/>
+                  </a:lnTo>
+                  <a:lnTo>
+                    <a:pt x="5371689" y="421224"/>
+                  </a:lnTo>
+                  <a:lnTo>
+                    <a:pt x="5300066" y="410021"/>
+                  </a:lnTo>
+                  <a:lnTo>
+                    <a:pt x="5228444" y="398502"/>
+                  </a:lnTo>
+                  <a:lnTo>
+                    <a:pt x="5156821" y="386659"/>
+                  </a:lnTo>
+                  <a:lnTo>
+                    <a:pt x="5085199" y="374482"/>
+                  </a:lnTo>
+                  <a:lnTo>
+                    <a:pt x="5013576" y="361962"/>
+                  </a:lnTo>
+                  <a:lnTo>
+                    <a:pt x="4941954" y="349090"/>
+                  </a:lnTo>
+                  <a:lnTo>
+                    <a:pt x="4870331" y="335855"/>
+                  </a:lnTo>
+                  <a:lnTo>
+                    <a:pt x="4798709" y="322247"/>
+                  </a:lnTo>
+                  <a:lnTo>
+                    <a:pt x="4727086" y="308255"/>
+                  </a:lnTo>
+                  <a:lnTo>
+                    <a:pt x="4655464" y="293870"/>
+                  </a:lnTo>
+                  <a:lnTo>
+                    <a:pt x="4583841" y="279079"/>
+                  </a:lnTo>
+                  <a:lnTo>
+                    <a:pt x="4512219" y="263872"/>
+                  </a:lnTo>
+                  <a:lnTo>
+                    <a:pt x="4440596" y="248236"/>
+                  </a:lnTo>
+                  <a:lnTo>
+                    <a:pt x="4368974" y="232160"/>
+                  </a:lnTo>
+                  <a:lnTo>
+                    <a:pt x="4297351" y="215630"/>
+                  </a:lnTo>
+                  <a:lnTo>
+                    <a:pt x="4225729" y="198636"/>
+                  </a:lnTo>
+                  <a:lnTo>
+                    <a:pt x="4154106" y="181162"/>
+                  </a:lnTo>
+                  <a:lnTo>
+                    <a:pt x="4082483" y="163196"/>
+                  </a:lnTo>
+                  <a:lnTo>
+                    <a:pt x="4010861" y="144724"/>
+                  </a:lnTo>
+                  <a:lnTo>
+                    <a:pt x="3939238" y="125732"/>
+                  </a:lnTo>
+                  <a:lnTo>
+                    <a:pt x="3867616" y="106204"/>
+                  </a:lnTo>
+                  <a:lnTo>
+                    <a:pt x="3795993" y="86127"/>
+                  </a:lnTo>
+                  <a:lnTo>
+                    <a:pt x="3724371" y="65484"/>
+                  </a:lnTo>
+                  <a:lnTo>
+                    <a:pt x="3652748" y="44259"/>
+                  </a:lnTo>
+                  <a:lnTo>
+                    <a:pt x="3581126" y="22437"/>
+                  </a:lnTo>
+                  <a:lnTo>
+                    <a:pt x="3509503" y="0"/>
+                  </a:lnTo>
+                  <a:lnTo>
+                    <a:pt x="3437881" y="7011"/>
+                  </a:lnTo>
+                  <a:lnTo>
+                    <a:pt x="3366258" y="38641"/>
+                  </a:lnTo>
+                  <a:lnTo>
+                    <a:pt x="3294636" y="69040"/>
+                  </a:lnTo>
+                  <a:lnTo>
+                    <a:pt x="3223013" y="98254"/>
+                  </a:lnTo>
+                  <a:lnTo>
+                    <a:pt x="3151391" y="126330"/>
+                  </a:lnTo>
+                  <a:lnTo>
+                    <a:pt x="3079768" y="153313"/>
+                  </a:lnTo>
+                  <a:lnTo>
+                    <a:pt x="3008146" y="179244"/>
+                  </a:lnTo>
+                  <a:lnTo>
+                    <a:pt x="2936523" y="204165"/>
+                  </a:lnTo>
+                  <a:lnTo>
+                    <a:pt x="2864901" y="228114"/>
+                  </a:lnTo>
+                  <a:lnTo>
+                    <a:pt x="2793278" y="251131"/>
+                  </a:lnTo>
+                  <a:lnTo>
+                    <a:pt x="2721655" y="273251"/>
+                  </a:lnTo>
+                  <a:lnTo>
+                    <a:pt x="2650033" y="294510"/>
+                  </a:lnTo>
+                  <a:lnTo>
+                    <a:pt x="2578410" y="314940"/>
+                  </a:lnTo>
+                  <a:lnTo>
+                    <a:pt x="2506788" y="334574"/>
+                  </a:lnTo>
+                  <a:lnTo>
+                    <a:pt x="2435165" y="353443"/>
+                  </a:lnTo>
+                  <a:lnTo>
+                    <a:pt x="2363543" y="371577"/>
+                  </a:lnTo>
+                  <a:lnTo>
+                    <a:pt x="2291920" y="389005"/>
+                  </a:lnTo>
+                  <a:lnTo>
+                    <a:pt x="2220298" y="405753"/>
+                  </a:lnTo>
+                  <a:lnTo>
+                    <a:pt x="2148675" y="421850"/>
+                  </a:lnTo>
+                  <a:lnTo>
+                    <a:pt x="2077053" y="437319"/>
+                  </a:lnTo>
+                  <a:lnTo>
+                    <a:pt x="2005430" y="452185"/>
+                  </a:lnTo>
+                  <a:lnTo>
+                    <a:pt x="1933808" y="466472"/>
+                  </a:lnTo>
+                  <a:lnTo>
+                    <a:pt x="1862185" y="480203"/>
+                  </a:lnTo>
+                  <a:lnTo>
+                    <a:pt x="1790563" y="493398"/>
+                  </a:lnTo>
+                  <a:lnTo>
+                    <a:pt x="1718940" y="506080"/>
+                  </a:lnTo>
+                  <a:lnTo>
+                    <a:pt x="1647318" y="518267"/>
+                  </a:lnTo>
+                  <a:lnTo>
+                    <a:pt x="1575695" y="529980"/>
+                  </a:lnTo>
+                  <a:lnTo>
+                    <a:pt x="1504073" y="541236"/>
+                  </a:lnTo>
+                  <a:lnTo>
+                    <a:pt x="1432450" y="552054"/>
+                  </a:lnTo>
+                  <a:lnTo>
+                    <a:pt x="1360827" y="562450"/>
+                  </a:lnTo>
+                  <a:lnTo>
+                    <a:pt x="1289205" y="572441"/>
+                  </a:lnTo>
+                  <a:lnTo>
+                    <a:pt x="1217582" y="582043"/>
+                  </a:lnTo>
+                  <a:lnTo>
+                    <a:pt x="1145960" y="591271"/>
+                  </a:lnTo>
+                  <a:lnTo>
+                    <a:pt x="1074337" y="600140"/>
+                  </a:lnTo>
+                  <a:lnTo>
+                    <a:pt x="1002715" y="608663"/>
+                  </a:lnTo>
+                  <a:lnTo>
+                    <a:pt x="931092" y="616854"/>
+                  </a:lnTo>
+                  <a:lnTo>
+                    <a:pt x="859470" y="624725"/>
+                  </a:lnTo>
+                  <a:lnTo>
+                    <a:pt x="787847" y="632290"/>
+                  </a:lnTo>
+                  <a:lnTo>
+                    <a:pt x="716225" y="639561"/>
+                  </a:lnTo>
+                  <a:lnTo>
+                    <a:pt x="644602" y="646548"/>
+                  </a:lnTo>
+                  <a:lnTo>
+                    <a:pt x="572980" y="653263"/>
+                  </a:lnTo>
+                  <a:lnTo>
+                    <a:pt x="501357" y="659716"/>
+                  </a:lnTo>
+                  <a:lnTo>
+                    <a:pt x="429735" y="665918"/>
+                  </a:lnTo>
+                  <a:lnTo>
+                    <a:pt x="358112" y="671878"/>
+                  </a:lnTo>
+                  <a:lnTo>
+                    <a:pt x="286490" y="677606"/>
+                  </a:lnTo>
+                  <a:lnTo>
+                    <a:pt x="214867" y="683111"/>
+                  </a:lnTo>
+                  <a:lnTo>
+                    <a:pt x="143245" y="688401"/>
+                  </a:lnTo>
+                  <a:lnTo>
+                    <a:pt x="71622" y="693486"/>
+                  </a:lnTo>
+                  <a:lnTo>
+                    <a:pt x="0" y="698372"/>
                   </a:lnTo>
                 </a:path>
               </a:pathLst>
@@ -4245,309 +4245,309 @@
           </p:nvSpPr>
           <p:spPr>
             <a:xfrm>
-              <a:off x="1172049" y="4434824"/>
-              <a:ext cx="7090630" cy="500757"/>
+              <a:off x="1172049" y="4435701"/>
+              <a:ext cx="7090630" cy="501011"/>
             </a:xfrm>
             <a:custGeom>
               <a:avLst/>
               <a:pathLst>
-                <a:path w="7090630" h="500757">
+                <a:path w="7090630" h="501011">
                   <a:moveTo>
-                    <a:pt x="0" y="500757"/>
+                    <a:pt x="0" y="501011"/>
                   </a:moveTo>
                   <a:lnTo>
-                    <a:pt x="71622" y="497035"/>
-                  </a:lnTo>
-                  <a:lnTo>
-                    <a:pt x="143245" y="493292"/>
-                  </a:lnTo>
-                  <a:lnTo>
-                    <a:pt x="214867" y="489526"/>
-                  </a:lnTo>
-                  <a:lnTo>
-                    <a:pt x="286490" y="485737"/>
-                  </a:lnTo>
-                  <a:lnTo>
-                    <a:pt x="358112" y="481926"/>
-                  </a:lnTo>
-                  <a:lnTo>
-                    <a:pt x="429735" y="478092"/>
-                  </a:lnTo>
-                  <a:lnTo>
-                    <a:pt x="501357" y="474235"/>
-                  </a:lnTo>
-                  <a:lnTo>
-                    <a:pt x="572980" y="470355"/>
-                  </a:lnTo>
-                  <a:lnTo>
-                    <a:pt x="644602" y="466452"/>
-                  </a:lnTo>
-                  <a:lnTo>
-                    <a:pt x="716225" y="462525"/>
-                  </a:lnTo>
-                  <a:lnTo>
-                    <a:pt x="787847" y="458575"/>
-                  </a:lnTo>
-                  <a:lnTo>
-                    <a:pt x="859470" y="454602"/>
-                  </a:lnTo>
-                  <a:lnTo>
-                    <a:pt x="931092" y="450604"/>
-                  </a:lnTo>
-                  <a:lnTo>
-                    <a:pt x="1002715" y="446582"/>
-                  </a:lnTo>
-                  <a:lnTo>
-                    <a:pt x="1074337" y="442537"/>
-                  </a:lnTo>
-                  <a:lnTo>
-                    <a:pt x="1145960" y="438467"/>
-                  </a:lnTo>
-                  <a:lnTo>
-                    <a:pt x="1217582" y="434373"/>
-                  </a:lnTo>
-                  <a:lnTo>
-                    <a:pt x="1289205" y="430254"/>
-                  </a:lnTo>
-                  <a:lnTo>
-                    <a:pt x="1360827" y="426111"/>
-                  </a:lnTo>
-                  <a:lnTo>
-                    <a:pt x="1432450" y="421943"/>
-                  </a:lnTo>
-                  <a:lnTo>
-                    <a:pt x="1504073" y="417750"/>
-                  </a:lnTo>
-                  <a:lnTo>
-                    <a:pt x="1575695" y="413532"/>
-                  </a:lnTo>
-                  <a:lnTo>
-                    <a:pt x="1647318" y="409289"/>
-                  </a:lnTo>
-                  <a:lnTo>
-                    <a:pt x="1718940" y="405020"/>
-                  </a:lnTo>
-                  <a:lnTo>
-                    <a:pt x="1790563" y="400725"/>
-                  </a:lnTo>
-                  <a:lnTo>
-                    <a:pt x="1862185" y="396405"/>
-                  </a:lnTo>
-                  <a:lnTo>
-                    <a:pt x="1933808" y="392059"/>
-                  </a:lnTo>
-                  <a:lnTo>
-                    <a:pt x="2005430" y="387688"/>
-                  </a:lnTo>
-                  <a:lnTo>
-                    <a:pt x="2077053" y="383289"/>
-                  </a:lnTo>
-                  <a:lnTo>
-                    <a:pt x="2148675" y="378865"/>
-                  </a:lnTo>
-                  <a:lnTo>
-                    <a:pt x="2220298" y="374414"/>
-                  </a:lnTo>
-                  <a:lnTo>
-                    <a:pt x="2291920" y="369937"/>
-                  </a:lnTo>
-                  <a:lnTo>
-                    <a:pt x="2363543" y="365432"/>
-                  </a:lnTo>
-                  <a:lnTo>
-                    <a:pt x="2435165" y="360901"/>
-                  </a:lnTo>
-                  <a:lnTo>
-                    <a:pt x="2506788" y="356343"/>
-                  </a:lnTo>
-                  <a:lnTo>
-                    <a:pt x="2578410" y="351757"/>
-                  </a:lnTo>
-                  <a:lnTo>
-                    <a:pt x="2650033" y="347144"/>
-                  </a:lnTo>
-                  <a:lnTo>
-                    <a:pt x="2721655" y="342503"/>
-                  </a:lnTo>
-                  <a:lnTo>
-                    <a:pt x="2793278" y="337834"/>
-                  </a:lnTo>
-                  <a:lnTo>
-                    <a:pt x="2864901" y="333138"/>
-                  </a:lnTo>
-                  <a:lnTo>
-                    <a:pt x="2936523" y="328413"/>
-                  </a:lnTo>
-                  <a:lnTo>
-                    <a:pt x="3008146" y="323660"/>
-                  </a:lnTo>
-                  <a:lnTo>
-                    <a:pt x="3079768" y="318879"/>
-                  </a:lnTo>
-                  <a:lnTo>
-                    <a:pt x="3151391" y="314069"/>
-                  </a:lnTo>
-                  <a:lnTo>
-                    <a:pt x="3223013" y="309230"/>
-                  </a:lnTo>
-                  <a:lnTo>
-                    <a:pt x="3294636" y="304362"/>
-                  </a:lnTo>
-                  <a:lnTo>
-                    <a:pt x="3366258" y="299466"/>
-                  </a:lnTo>
-                  <a:lnTo>
-                    <a:pt x="3437881" y="294539"/>
-                  </a:lnTo>
-                  <a:lnTo>
-                    <a:pt x="3509503" y="289584"/>
-                  </a:lnTo>
-                  <a:lnTo>
-                    <a:pt x="3581126" y="284598"/>
-                  </a:lnTo>
-                  <a:lnTo>
-                    <a:pt x="3652748" y="279583"/>
-                  </a:lnTo>
-                  <a:lnTo>
-                    <a:pt x="3724371" y="274538"/>
-                  </a:lnTo>
-                  <a:lnTo>
-                    <a:pt x="3795993" y="269463"/>
-                  </a:lnTo>
-                  <a:lnTo>
-                    <a:pt x="3867616" y="264357"/>
-                  </a:lnTo>
-                  <a:lnTo>
-                    <a:pt x="3939238" y="259221"/>
-                  </a:lnTo>
-                  <a:lnTo>
-                    <a:pt x="4010861" y="254054"/>
-                  </a:lnTo>
-                  <a:lnTo>
-                    <a:pt x="4082483" y="248856"/>
-                  </a:lnTo>
-                  <a:lnTo>
-                    <a:pt x="4154106" y="243626"/>
-                  </a:lnTo>
-                  <a:lnTo>
-                    <a:pt x="4225729" y="238366"/>
-                  </a:lnTo>
-                  <a:lnTo>
-                    <a:pt x="4297351" y="233074"/>
-                  </a:lnTo>
-                  <a:lnTo>
-                    <a:pt x="4368974" y="227750"/>
-                  </a:lnTo>
-                  <a:lnTo>
-                    <a:pt x="4440596" y="222395"/>
-                  </a:lnTo>
-                  <a:lnTo>
-                    <a:pt x="4512219" y="217007"/>
-                  </a:lnTo>
-                  <a:lnTo>
-                    <a:pt x="4583841" y="211588"/>
-                  </a:lnTo>
-                  <a:lnTo>
-                    <a:pt x="4655464" y="206136"/>
-                  </a:lnTo>
-                  <a:lnTo>
-                    <a:pt x="4727086" y="200651"/>
-                  </a:lnTo>
-                  <a:lnTo>
-                    <a:pt x="4798709" y="195133"/>
-                  </a:lnTo>
-                  <a:lnTo>
-                    <a:pt x="4870331" y="189582"/>
-                  </a:lnTo>
-                  <a:lnTo>
-                    <a:pt x="4941954" y="183998"/>
-                  </a:lnTo>
-                  <a:lnTo>
-                    <a:pt x="5013576" y="178381"/>
-                  </a:lnTo>
-                  <a:lnTo>
-                    <a:pt x="5085199" y="172730"/>
-                  </a:lnTo>
-                  <a:lnTo>
-                    <a:pt x="5156821" y="167045"/>
-                  </a:lnTo>
-                  <a:lnTo>
-                    <a:pt x="5228444" y="161326"/>
-                  </a:lnTo>
-                  <a:lnTo>
-                    <a:pt x="5300066" y="155573"/>
-                  </a:lnTo>
-                  <a:lnTo>
-                    <a:pt x="5371689" y="149786"/>
-                  </a:lnTo>
-                  <a:lnTo>
-                    <a:pt x="5443311" y="143964"/>
-                  </a:lnTo>
-                  <a:lnTo>
-                    <a:pt x="5514934" y="138107"/>
-                  </a:lnTo>
-                  <a:lnTo>
-                    <a:pt x="5586557" y="132215"/>
-                  </a:lnTo>
-                  <a:lnTo>
-                    <a:pt x="5658179" y="126287"/>
-                  </a:lnTo>
-                  <a:lnTo>
-                    <a:pt x="5729802" y="120324"/>
-                  </a:lnTo>
-                  <a:lnTo>
-                    <a:pt x="5801424" y="114326"/>
-                  </a:lnTo>
-                  <a:lnTo>
-                    <a:pt x="5873047" y="108292"/>
-                  </a:lnTo>
-                  <a:lnTo>
-                    <a:pt x="5944669" y="102221"/>
-                  </a:lnTo>
-                  <a:lnTo>
-                    <a:pt x="6016292" y="96114"/>
-                  </a:lnTo>
-                  <a:lnTo>
-                    <a:pt x="6087914" y="89971"/>
-                  </a:lnTo>
-                  <a:lnTo>
-                    <a:pt x="6159537" y="83791"/>
-                  </a:lnTo>
-                  <a:lnTo>
-                    <a:pt x="6231159" y="77573"/>
-                  </a:lnTo>
-                  <a:lnTo>
-                    <a:pt x="6302782" y="71319"/>
-                  </a:lnTo>
-                  <a:lnTo>
-                    <a:pt x="6374404" y="65027"/>
-                  </a:lnTo>
-                  <a:lnTo>
-                    <a:pt x="6446027" y="58698"/>
-                  </a:lnTo>
-                  <a:lnTo>
-                    <a:pt x="6517649" y="52330"/>
-                  </a:lnTo>
-                  <a:lnTo>
-                    <a:pt x="6589272" y="45925"/>
-                  </a:lnTo>
-                  <a:lnTo>
-                    <a:pt x="6660894" y="39481"/>
-                  </a:lnTo>
-                  <a:lnTo>
-                    <a:pt x="6732517" y="32998"/>
-                  </a:lnTo>
-                  <a:lnTo>
-                    <a:pt x="6804139" y="26477"/>
-                  </a:lnTo>
-                  <a:lnTo>
-                    <a:pt x="6875762" y="19917"/>
-                  </a:lnTo>
-                  <a:lnTo>
-                    <a:pt x="6947385" y="13317"/>
-                  </a:lnTo>
-                  <a:lnTo>
-                    <a:pt x="7019007" y="6678"/>
+                    <a:pt x="71622" y="497290"/>
+                  </a:lnTo>
+                  <a:lnTo>
+                    <a:pt x="143245" y="493547"/>
+                  </a:lnTo>
+                  <a:lnTo>
+                    <a:pt x="214867" y="489781"/>
+                  </a:lnTo>
+                  <a:lnTo>
+                    <a:pt x="286490" y="485993"/>
+                  </a:lnTo>
+                  <a:lnTo>
+                    <a:pt x="358112" y="482181"/>
+                  </a:lnTo>
+                  <a:lnTo>
+                    <a:pt x="429735" y="478348"/>
+                  </a:lnTo>
+                  <a:lnTo>
+                    <a:pt x="501357" y="474491"/>
+                  </a:lnTo>
+                  <a:lnTo>
+                    <a:pt x="572980" y="470610"/>
+                  </a:lnTo>
+                  <a:lnTo>
+                    <a:pt x="644602" y="466707"/>
+                  </a:lnTo>
+                  <a:lnTo>
+                    <a:pt x="716225" y="462780"/>
+                  </a:lnTo>
+                  <a:lnTo>
+                    <a:pt x="787847" y="458830"/>
+                  </a:lnTo>
+                  <a:lnTo>
+                    <a:pt x="859470" y="454856"/>
+                  </a:lnTo>
+                  <a:lnTo>
+                    <a:pt x="931092" y="450858"/>
+                  </a:lnTo>
+                  <a:lnTo>
+                    <a:pt x="1002715" y="446836"/>
+                  </a:lnTo>
+                  <a:lnTo>
+                    <a:pt x="1074337" y="442791"/>
+                  </a:lnTo>
+                  <a:lnTo>
+                    <a:pt x="1145960" y="438720"/>
+                  </a:lnTo>
+                  <a:lnTo>
+                    <a:pt x="1217582" y="434626"/>
+                  </a:lnTo>
+                  <a:lnTo>
+                    <a:pt x="1289205" y="430507"/>
+                  </a:lnTo>
+                  <a:lnTo>
+                    <a:pt x="1360827" y="426363"/>
+                  </a:lnTo>
+                  <a:lnTo>
+                    <a:pt x="1432450" y="422194"/>
+                  </a:lnTo>
+                  <a:lnTo>
+                    <a:pt x="1504073" y="418001"/>
+                  </a:lnTo>
+                  <a:lnTo>
+                    <a:pt x="1575695" y="413782"/>
+                  </a:lnTo>
+                  <a:lnTo>
+                    <a:pt x="1647318" y="409538"/>
+                  </a:lnTo>
+                  <a:lnTo>
+                    <a:pt x="1718940" y="405268"/>
+                  </a:lnTo>
+                  <a:lnTo>
+                    <a:pt x="1790563" y="400973"/>
+                  </a:lnTo>
+                  <a:lnTo>
+                    <a:pt x="1862185" y="396652"/>
+                  </a:lnTo>
+                  <a:lnTo>
+                    <a:pt x="1933808" y="392305"/>
+                  </a:lnTo>
+                  <a:lnTo>
+                    <a:pt x="2005430" y="387932"/>
+                  </a:lnTo>
+                  <a:lnTo>
+                    <a:pt x="2077053" y="383533"/>
+                  </a:lnTo>
+                  <a:lnTo>
+                    <a:pt x="2148675" y="379108"/>
+                  </a:lnTo>
+                  <a:lnTo>
+                    <a:pt x="2220298" y="374655"/>
+                  </a:lnTo>
+                  <a:lnTo>
+                    <a:pt x="2291920" y="370177"/>
+                  </a:lnTo>
+                  <a:lnTo>
+                    <a:pt x="2363543" y="365671"/>
+                  </a:lnTo>
+                  <a:lnTo>
+                    <a:pt x="2435165" y="361139"/>
+                  </a:lnTo>
+                  <a:lnTo>
+                    <a:pt x="2506788" y="356579"/>
+                  </a:lnTo>
+                  <a:lnTo>
+                    <a:pt x="2578410" y="351992"/>
+                  </a:lnTo>
+                  <a:lnTo>
+                    <a:pt x="2650033" y="347377"/>
+                  </a:lnTo>
+                  <a:lnTo>
+                    <a:pt x="2721655" y="342735"/>
+                  </a:lnTo>
+                  <a:lnTo>
+                    <a:pt x="2793278" y="338064"/>
+                  </a:lnTo>
+                  <a:lnTo>
+                    <a:pt x="2864901" y="333366"/>
+                  </a:lnTo>
+                  <a:lnTo>
+                    <a:pt x="2936523" y="328640"/>
+                  </a:lnTo>
+                  <a:lnTo>
+                    <a:pt x="3008146" y="323885"/>
+                  </a:lnTo>
+                  <a:lnTo>
+                    <a:pt x="3079768" y="319102"/>
+                  </a:lnTo>
+                  <a:lnTo>
+                    <a:pt x="3151391" y="314290"/>
+                  </a:lnTo>
+                  <a:lnTo>
+                    <a:pt x="3223013" y="309450"/>
+                  </a:lnTo>
+                  <a:lnTo>
+                    <a:pt x="3294636" y="304580"/>
+                  </a:lnTo>
+                  <a:lnTo>
+                    <a:pt x="3366258" y="299681"/>
+                  </a:lnTo>
+                  <a:lnTo>
+                    <a:pt x="3437881" y="294753"/>
+                  </a:lnTo>
+                  <a:lnTo>
+                    <a:pt x="3509503" y="289795"/>
+                  </a:lnTo>
+                  <a:lnTo>
+                    <a:pt x="3581126" y="284807"/>
+                  </a:lnTo>
+                  <a:lnTo>
+                    <a:pt x="3652748" y="279789"/>
+                  </a:lnTo>
+                  <a:lnTo>
+                    <a:pt x="3724371" y="274742"/>
+                  </a:lnTo>
+                  <a:lnTo>
+                    <a:pt x="3795993" y="269664"/>
+                  </a:lnTo>
+                  <a:lnTo>
+                    <a:pt x="3867616" y="264556"/>
+                  </a:lnTo>
+                  <a:lnTo>
+                    <a:pt x="3939238" y="259417"/>
+                  </a:lnTo>
+                  <a:lnTo>
+                    <a:pt x="4010861" y="254247"/>
+                  </a:lnTo>
+                  <a:lnTo>
+                    <a:pt x="4082483" y="249046"/>
+                  </a:lnTo>
+                  <a:lnTo>
+                    <a:pt x="4154106" y="243814"/>
+                  </a:lnTo>
+                  <a:lnTo>
+                    <a:pt x="4225729" y="238551"/>
+                  </a:lnTo>
+                  <a:lnTo>
+                    <a:pt x="4297351" y="233256"/>
+                  </a:lnTo>
+                  <a:lnTo>
+                    <a:pt x="4368974" y="227929"/>
+                  </a:lnTo>
+                  <a:lnTo>
+                    <a:pt x="4440596" y="222571"/>
+                  </a:lnTo>
+                  <a:lnTo>
+                    <a:pt x="4512219" y="217180"/>
+                  </a:lnTo>
+                  <a:lnTo>
+                    <a:pt x="4583841" y="211757"/>
+                  </a:lnTo>
+                  <a:lnTo>
+                    <a:pt x="4655464" y="206301"/>
+                  </a:lnTo>
+                  <a:lnTo>
+                    <a:pt x="4727086" y="200813"/>
+                  </a:lnTo>
+                  <a:lnTo>
+                    <a:pt x="4798709" y="195292"/>
+                  </a:lnTo>
+                  <a:lnTo>
+                    <a:pt x="4870331" y="189738"/>
+                  </a:lnTo>
+                  <a:lnTo>
+                    <a:pt x="4941954" y="184150"/>
+                  </a:lnTo>
+                  <a:lnTo>
+                    <a:pt x="5013576" y="178529"/>
+                  </a:lnTo>
+                  <a:lnTo>
+                    <a:pt x="5085199" y="172874"/>
+                  </a:lnTo>
+                  <a:lnTo>
+                    <a:pt x="5156821" y="167185"/>
+                  </a:lnTo>
+                  <a:lnTo>
+                    <a:pt x="5228444" y="161463"/>
+                  </a:lnTo>
+                  <a:lnTo>
+                    <a:pt x="5300066" y="155705"/>
+                  </a:lnTo>
+                  <a:lnTo>
+                    <a:pt x="5371689" y="149914"/>
+                  </a:lnTo>
+                  <a:lnTo>
+                    <a:pt x="5443311" y="144087"/>
+                  </a:lnTo>
+                  <a:lnTo>
+                    <a:pt x="5514934" y="138226"/>
+                  </a:lnTo>
+                  <a:lnTo>
+                    <a:pt x="5586557" y="132330"/>
+                  </a:lnTo>
+                  <a:lnTo>
+                    <a:pt x="5658179" y="126398"/>
+                  </a:lnTo>
+                  <a:lnTo>
+                    <a:pt x="5729802" y="120430"/>
+                  </a:lnTo>
+                  <a:lnTo>
+                    <a:pt x="5801424" y="114427"/>
+                  </a:lnTo>
+                  <a:lnTo>
+                    <a:pt x="5873047" y="108388"/>
+                  </a:lnTo>
+                  <a:lnTo>
+                    <a:pt x="5944669" y="102312"/>
+                  </a:lnTo>
+                  <a:lnTo>
+                    <a:pt x="6016292" y="96201"/>
+                  </a:lnTo>
+                  <a:lnTo>
+                    <a:pt x="6087914" y="90052"/>
+                  </a:lnTo>
+                  <a:lnTo>
+                    <a:pt x="6159537" y="83867"/>
+                  </a:lnTo>
+                  <a:lnTo>
+                    <a:pt x="6231159" y="77644"/>
+                  </a:lnTo>
+                  <a:lnTo>
+                    <a:pt x="6302782" y="71385"/>
+                  </a:lnTo>
+                  <a:lnTo>
+                    <a:pt x="6374404" y="65087"/>
+                  </a:lnTo>
+                  <a:lnTo>
+                    <a:pt x="6446027" y="58752"/>
+                  </a:lnTo>
+                  <a:lnTo>
+                    <a:pt x="6517649" y="52379"/>
+                  </a:lnTo>
+                  <a:lnTo>
+                    <a:pt x="6589272" y="45968"/>
+                  </a:lnTo>
+                  <a:lnTo>
+                    <a:pt x="6660894" y="39518"/>
+                  </a:lnTo>
+                  <a:lnTo>
+                    <a:pt x="6732517" y="33030"/>
+                  </a:lnTo>
+                  <a:lnTo>
+                    <a:pt x="6804139" y="26502"/>
+                  </a:lnTo>
+                  <a:lnTo>
+                    <a:pt x="6875762" y="19936"/>
+                  </a:lnTo>
+                  <a:lnTo>
+                    <a:pt x="6947385" y="13330"/>
+                  </a:lnTo>
+                  <a:lnTo>
+                    <a:pt x="7019007" y="6685"/>
                   </a:lnTo>
                   <a:lnTo>
                     <a:pt x="7090630" y="0"/>
@@ -4622,7 +4622,7 @@
           </p:nvSpPr>
           <p:spPr>
             <a:xfrm>
-              <a:off x="4632789" y="2073503"/>
+              <a:off x="4648520" y="2073503"/>
               <a:ext cx="0" cy="3649639"/>
             </a:xfrm>
             <a:custGeom>
@@ -4665,7 +4665,7 @@
           </p:nvSpPr>
           <p:spPr>
             <a:xfrm>
-              <a:off x="3519238" y="2073503"/>
+              <a:off x="3510041" y="2073503"/>
               <a:ext cx="0" cy="3649639"/>
             </a:xfrm>
             <a:custGeom>
@@ -4708,7 +4708,7 @@
           </p:nvSpPr>
           <p:spPr>
             <a:xfrm>
-              <a:off x="5667105" y="2073503"/>
+              <a:off x="5671562" y="2073503"/>
               <a:ext cx="0" cy="3649639"/>
             </a:xfrm>
             <a:custGeom>
@@ -4981,7 +4981,7 @@
           </p:nvSpPr>
           <p:spPr>
             <a:xfrm>
-              <a:off x="1701509" y="5785772"/>
+              <a:off x="1701133" y="5785772"/>
               <a:ext cx="161574" cy="80101"/>
             </a:xfrm>
             <a:prstGeom prst="rect">
@@ -5027,7 +5027,7 @@
           </p:nvSpPr>
           <p:spPr>
             <a:xfrm>
-              <a:off x="3528691" y="5785772"/>
+              <a:off x="3525106" y="5785772"/>
               <a:ext cx="161574" cy="80101"/>
             </a:xfrm>
             <a:prstGeom prst="rect">
@@ -5073,7 +5073,7 @@
           </p:nvSpPr>
           <p:spPr>
             <a:xfrm>
-              <a:off x="5405571" y="5785772"/>
+              <a:off x="5398776" y="5785772"/>
               <a:ext cx="62179" cy="80101"/>
             </a:xfrm>
             <a:prstGeom prst="rect">
@@ -5119,7 +5119,7 @@
           </p:nvSpPr>
           <p:spPr>
             <a:xfrm>
-              <a:off x="7201663" y="5785772"/>
+              <a:off x="7191659" y="5785772"/>
               <a:ext cx="124358" cy="80101"/>
             </a:xfrm>
             <a:prstGeom prst="rect">
@@ -5290,7 +5290,7 @@
                   <a:latin typeface="Helvetica"/>
                   <a:cs typeface="Helvetica"/>
                 </a:rPr>
-                <a:t>subHR per 10 % decline: 0.93 (0.60-1.42), p_Bonf = 1.000 (n = 6)  |  per IQR decline (Δ = 23.5 %): 0.84 (0.30-2.30)  |  IQR: [-21.0, 2.5] %</a:t>
+                <a:t>subHR per 10 % decline: 0.93 (0.60-1.42), p_Bonf = 1.000 (n = 6)  |  per IQR decline (Δ = 23.7 %): 0.83 (0.30-2.31)  |  IQR: [-21.1, 2.7] %</a:t>
               </a:r>
             </a:p>
           </p:txBody>
